--- a/Progression_P2/P2-L12_Review_and_Unit_Assessment_Education_and_Future_Plans.pptx
+++ b/Progression_P2/P2-L12_Review_and_Unit_Assessment_Education_and_Future_Plans.pptx
@@ -626,7 +626,11 @@
           <a:lstStyle/>
           <a:p>
             <a:r>
-              <a:rPr lang="en-US" dirty="0"/>
+              <a:rPr lang="ar-SA" dirty="0">
+                <a:latin typeface="Amiri" pitchFamily="2" charset="-78"/>
+                <a:ea typeface="Amiri" pitchFamily="2" charset="-78"/>
+                <a:cs typeface="Amiri" pitchFamily="2" charset="-78"/>
+              </a:rPr>
               <a:t>LISTENING TEXT 1 · QUESTIONS 5–8 (website Part A, 20 marks). Before listening: label each question R / C / P / O and write the signal word (P2-L10). Question 5 is a statistic: سِتِّينَ بِالْمِئَةِ = 60%. Question 7 asks for the speaker’s OWN view (أَرَى أَنَّ). Each recording may be played twice; students answer after the second reading.
 SCRIPT: يَقُولُ الطَّالِبُ: بِحُلُولِ نِهَايَةِ الثَّانَوِيَّةِ، كُنْتُ قَدْ قَرَّرْتُ دِرَاسَةَ الهَنْدَسَةِ، وَكُنْتُ قَدْ حَصَلْتُ عَلَى خِبْرَةٍ عَمَلِيَّةٍ فِي البَرْمَجَةِ. قَالَ مُرْشِدِي إِنَّنِي مُؤَهَّلٌ، وَأَكَّدَ أَنَّ اجْتِهَادِي سَيُثْمِرُ. إِذَا قُبِلْتُ فِي الجَامِعَةِ الَّتِي أُرِيدُهَا، سَأَتَخَصَّصُ فِي الطَّاقَةِ المُتَجَدِّدَةِ. وَلَوْ تَوَافَرَتْ لِي مَوَارِدُ أَفْضَلُ مُبَكِّرًا، لَكُنْتُ قَدْ تَقَدَّمْتُ أَسْرَعَ. وَأَشَارَ تَقْرِيرٌ إِلَى أَنَّ نِسْبَةَ القَبُولِ فِي هٰذَا المَجَالِ تَبْلُغُ سِتِّينَ بِالْمِئَةِ. أَرَى أَنَّ ضَغْطَ الامْتِحَانَاتِ كَبِيرٌ، لٰكِنَّهُ يَدْفَعُنِي إِلَى العَمَلِ. وَسَوْفَ أُسْهِمُ فِي مَجَالِي بَعْدَ التَّخَرُّجِ.
 Private chat: 4 letters.</a:t>
@@ -716,7 +720,11 @@
           <a:lstStyle/>
           <a:p>
             <a:r>
-              <a:rPr lang="en-US" dirty="0"/>
+              <a:rPr lang="ar-SA" dirty="0">
+                <a:latin typeface="Amiri" pitchFamily="2" charset="-78"/>
+                <a:ea typeface="Amiri" pitchFamily="2" charset="-78"/>
+                <a:cs typeface="Amiri" pitchFamily="2" charset="-78"/>
+              </a:rPr>
               <a:t>Mark /4. Reveal the script only after the attempt; ask which signal (a reporting verb + pronoun · كَانَ قَدْ · إِذَا / لَوْ · أَرَى أَنَّ · a speaker’s name) proved each answer.</a:t>
             </a:r>
             <a:endParaRPr lang="en-US" dirty="0"/>
@@ -804,7 +812,11 @@
           <a:lstStyle/>
           <a:p>
             <a:r>
-              <a:rPr lang="en-US" dirty="0"/>
+              <a:rPr lang="ar-SA" dirty="0">
+                <a:latin typeface="Amiri" pitchFamily="2" charset="-78"/>
+                <a:ea typeface="Amiri" pitchFamily="2" charset="-78"/>
+                <a:cs typeface="Amiri" pitchFamily="2" charset="-78"/>
+              </a:rPr>
               <a:t>LISTENING TEXT 2 · 6 QUESTIONS (website Part A, 20 marks). Before listening: label each question R / C / P / O and write the signal word (P2-L10). Attribution: write S / L / both beside each question while listening — listen for the name before each line. Each recording may be played twice; students answer after the second reading.
 SCRIPT: سَامِي: كَانَ العَالَمُ العَرَبِيُّ قَدْ أَسَّسَ أَرْقَى الأَنْظِمَةِ التَّعْلِيمِيَّةِ فِي العَصْرِ الذَّهَبِيِّ. لَيْلَى: أَتَّفِقُ، وَأَشَارَ المُؤَرِّخُونَ إِلَى أَنَّ دَارَ الحِكْمَةِ كَانَتْ قَدِ اسْتَقْطَبَتْ عُلَمَاءَ كَثِيرِينَ. سَامِي: لٰكِنَّ الإِصْلَاحَ اليَوْمَ ضَرُورِيٌّ؛ فَبَعْضُ المَنَاطِقِ تُعَانِي مِنْ أُمِّيَّةٍ. لَيْلَى: وَقَالَ خَبِيرٌ إِنَّ الاسْتِثْمَارَ فِي المُعَلِّمِ هُوَ الحَلُّ. سَامِي: وَلَوِ اسْتُثْمِرَ مُبَكِّرًا، لَتَغَيَّرَ الوَضْعُ كَثِيرًا. لَيْلَى: وَأَنَا أَرَى أَنَّ تَعْلِيمَ المَرْأَةِ أَوْلَوِيَّةٌ.
 Private chat: 6 letters.</a:t>
@@ -894,7 +906,11 @@
           <a:lstStyle/>
           <a:p>
             <a:r>
-              <a:rPr lang="en-US" dirty="0"/>
+              <a:rPr lang="ar-SA" dirty="0">
+                <a:latin typeface="Amiri" pitchFamily="2" charset="-78"/>
+                <a:ea typeface="Amiri" pitchFamily="2" charset="-78"/>
+                <a:cs typeface="Amiri" pitchFamily="2" charset="-78"/>
+              </a:rPr>
               <a:t>Mark /6. Reveal the script only after the attempt; ask which signal (a reporting verb + pronoun · كَانَ قَدْ · إِذَا / لَوْ · أَرَى أَنَّ · a speaker’s name) proved each answer.</a:t>
             </a:r>
             <a:endParaRPr lang="en-US" dirty="0"/>
@@ -982,7 +998,11 @@
           <a:lstStyle/>
           <a:p>
             <a:r>
-              <a:rPr lang="en-US" dirty="0"/>
+              <a:rPr lang="ar-SA" dirty="0">
+                <a:latin typeface="Amiri" pitchFamily="2" charset="-78"/>
+                <a:ea typeface="Amiri" pitchFamily="2" charset="-78"/>
+                <a:cs typeface="Amiri" pitchFamily="2" charset="-78"/>
+              </a:rPr>
               <a:t>LISTENING TEXT 3 · 6 QUESTIONS (website Part A, 20 marks). Before listening: label each question R / C / P / O and write the signal word (P2-L10). Listen for the reporting verbs (أَكَّدَ · أَشَارَ إِلَى · قَالَ إِنَّ · اعْتَرَفَ بِـ) and the two conditionals. Each recording may be played twice; students answer after the second reading.
 SCRIPT: يَقُولُ مَسْؤُولٌ فِي الوِزَارَةِ: كَانَتِ الوِزَارَةُ قَدْ أَطْلَقَتْ خُطَّةَ إِصْلَاحٍ قَبْلَ ثَلَاثِ سَنَوَاتٍ. وَأَكَّدَ أَنَّ نِسْبَةَ الالْتِحَاقِ ارْتَفَعَتْ بَعْدَ الإِصْلَاحِ. وَأَشَارَ إِلَى أَنَّ الفَجْوَةَ بَيْنَ المَنَاطِقِ مَا زَالَتْ قَائِمَةً. وَقَالَ إِنَّهُ إِذَا اسْتَمَرَّ الاسْتِثْمَارُ، سَتَتَقَلَّصُ الفَجْوَةُ. وَاعْتَرَفَ بِأَنَّ تَدْرِيبَ المُعَلِّمِينَ يَحْتَاجُ إِلَى وَقْتٍ. وَلَوْ تَوَافَرَتْ مِيزَانِيَّةٌ أَكْبَرُ، لَكَانَ التَّقَدُّمُ أَسْرَعَ.
 Private chat: 6 letters.</a:t>
@@ -1072,7 +1092,11 @@
           <a:lstStyle/>
           <a:p>
             <a:r>
-              <a:rPr lang="en-US" dirty="0"/>
+              <a:rPr lang="ar-SA" dirty="0">
+                <a:latin typeface="Amiri" pitchFamily="2" charset="-78"/>
+                <a:ea typeface="Amiri" pitchFamily="2" charset="-78"/>
+                <a:cs typeface="Amiri" pitchFamily="2" charset="-78"/>
+              </a:rPr>
               <a:t>Mark /6. Reveal the script only after the attempt; ask which signal (a reporting verb + pronoun · كَانَ قَدْ · إِذَا / لَوْ · أَرَى أَنَّ · a speaker’s name) proved each answer.</a:t>
             </a:r>
             <a:endParaRPr lang="en-US" dirty="0"/>
@@ -1512,7 +1536,11 @@
           <a:lstStyle/>
           <a:p>
             <a:r>
-              <a:rPr lang="en-US" dirty="0"/>
+              <a:rPr lang="ar-SA" dirty="0">
+                <a:latin typeface="Amiri" pitchFamily="2" charset="-78"/>
+                <a:ea typeface="Amiri" pitchFamily="2" charset="-78"/>
+                <a:cs typeface="Amiri" pitchFamily="2" charset="-78"/>
+              </a:rPr>
               <a:t>WELCOME (1 min) — while students join.
 • Greet each student by name as they arrive: السَّلَامُ عَلَيْكُمْ. Take the register (Pastoral Tracker: attendance 0/1).
 • 2-MINUTE CHECK-IN (SEND training): a private chat to any student who seemed unsettled last lesson — “Are you okay today? 👍 / 👎”.
@@ -1693,7 +1721,11 @@
           <a:lstStyle/>
           <a:p>
             <a:r>
-              <a:rPr lang="en-US" dirty="0"/>
+              <a:rPr lang="ar-SA" dirty="0">
+                <a:latin typeface="Amiri" pitchFamily="2" charset="-78"/>
+                <a:ea typeface="Amiri" pitchFamily="2" charset="-78"/>
+                <a:cs typeface="Amiri" pitchFamily="2" charset="-78"/>
+              </a:rPr>
               <a:t>WRITING QUESTION 1 (website, 5 marks): one mark per field completed accurately in Arabic (a phrase is enough). Field 2 must use كُنْتُ قَدْ + past; field 3 قَالَ إِنَّ (+ إِنَّنِي); field 4 a Type 1 conditional (إِذَا + past → سَـ). Students may describe a fictional applicant.</a:t>
             </a:r>
             <a:endParaRPr lang="en-US" dirty="0"/>
@@ -1781,7 +1813,11 @@
           <a:lstStyle/>
           <a:p>
             <a:r>
-              <a:rPr lang="en-US" dirty="0"/>
+              <a:rPr lang="ar-SA" dirty="0">
+                <a:latin typeface="Amiri" pitchFamily="2" charset="-78"/>
+                <a:ea typeface="Amiri" pitchFamily="2" charset="-78"/>
+                <a:cs typeface="Amiri" pitchFamily="2" charset="-78"/>
+              </a:rPr>
               <a:t>WRITING QUESTION 2 (website, 15 marks): a 140–155-word article on education and future plans. Required: a past perfect, reported speech with a verb other than قَالَ, a Type 1 and a Type 2 conditional; formal connectors add credit. Mark scheme exactly as on the website (Accuracy: إِنَّ / أَنَّ 2 · كَانَ agreement 2 · the لَـ of the Type 2 result 1). The P2-L09 website model is a full-mark exemplar — show it ONLY after writing.</a:t>
             </a:r>
             <a:endParaRPr lang="en-US" dirty="0"/>
@@ -1869,7 +1905,11 @@
           <a:lstStyle/>
           <a:p>
             <a:r>
-              <a:rPr lang="en-US" dirty="0"/>
+              <a:rPr lang="ar-SA" dirty="0">
+                <a:latin typeface="Amiri" pitchFamily="2" charset="-78"/>
+                <a:ea typeface="Amiri" pitchFamily="2" charset="-78"/>
+                <a:cs typeface="Amiri" pitchFamily="2" charset="-78"/>
+              </a:rPr>
               <a:t>ROLE PLAY (website, 4 marks). Teacher plays a university admissions tutor: أَهْلًا وَسَهْلًا. حَدِّثْنِي عَنْ نَفْسِكَ وَعَنْ خَلْفِيَّتِكَ التَّعْلِيمِيَّةِ. Model answers: كُنْتُ قَدْ حَصَلْتُ عَلَى خِبْرَةٍ فِي البَرْمَجَةِ … · قَالَ أُسْتَاذِي إِنَّنِي مُجْتَهِدٌ … · إِذَا قُبِلْتُ، سَأَدْرُسُ الهَنْدَسَةَ … · مَا التَّخَصُّصُ الأَنْسَبُ لِطُمُوحِي؟ Website mark scheme: Communication (2): all four prompts are addressed clearly and relevantly. Accuracy (2): prompt 1 uses the past perfect and prompt 2 uses قَالَ إِنَّ, both formed correctly. The Type 1 plan in prompt 3 is accurate. To a girl: عَرِّفِي · صِفِي · قُولِي · اطْلُبِي · قُبِلْتِ.</a:t>
             </a:r>
             <a:endParaRPr lang="en-US" dirty="0"/>
@@ -1957,7 +1997,11 @@
           <a:lstStyle/>
           <a:p>
             <a:r>
-              <a:rPr lang="en-US" dirty="0"/>
+              <a:rPr lang="ar-SA" dirty="0">
+                <a:latin typeface="Amiri" pitchFamily="2" charset="-78"/>
+                <a:ea typeface="Amiri" pitchFamily="2" charset="-78"/>
+                <a:cs typeface="Amiri" pitchFamily="2" charset="-78"/>
+              </a:rPr>
               <a:t>TOPIC CONVERSATION (website, 6 marks): structure · reason · extra (P2-L11). Website mark scheme: Communication (3): answers are developed with point, reason and example. Quality of language (3): the past perfect (Q1), reported speech (Q2) and a Type 2 conditional (Q3) all appear and are accurate. Record whether the candidate produces the Type 2 conditional spontaneously or avoids it. Allow time-buying and repair phrases (سُؤَالٌ مُهِمٌّ · دَعْنِي أُفَكِّرُ · عَفْوًا، أَقْصِدُ). To a girl: كُنْتِ قَدْ قَرَّرْتِهِ · مُسْتَقْبَلِكِ · مُعَلِّمُوكِ · طُمُوحَاتِكِ · لَدَيْكِ · سَتَخْتَارِينَ. ORGANISATION: one-to-one while others finish writing, or trusted pairs with the teacher as examiner.</a:t>
             </a:r>
             <a:endParaRPr lang="en-US" dirty="0"/>
@@ -2671,7 +2715,11 @@
           <a:lstStyle/>
           <a:p>
             <a:r>
-              <a:rPr lang="en-US" dirty="0"/>
+              <a:rPr lang="ar-SA" dirty="0">
+                <a:latin typeface="Amiri" pitchFamily="2" charset="-78"/>
+                <a:ea typeface="Amiri" pitchFamily="2" charset="-78"/>
+                <a:cs typeface="Amiri" pitchFamily="2" charset="-78"/>
+              </a:rPr>
               <a:t>REVIEW (website twelve-question grammar spine, correct answers): إِنَّ · أَنَّ · قَالَ إِنَّهُ سَيَدْرُسُ الطِّبَّ · كَانَتْ قَدْ حَصَلَتْ · أَنْهَيْتُ · إِذَا دَرَسْتَ، سَتَنْجَحُ · لَوْ دَرَسَ، لَنَجَحَ · دَرَسَ · إِلَى · فِي · لِـ · أَنَّ التَّحْصِيلَ. Close the vocabulary vault during each section.</a:t>
             </a:r>
             <a:endParaRPr lang="en-US" dirty="0"/>
@@ -2847,7 +2895,11 @@
           <a:lstStyle/>
           <a:p>
             <a:r>
-              <a:rPr lang="en-US" dirty="0"/>
+              <a:rPr lang="ar-SA" dirty="0">
+                <a:latin typeface="Amiri" pitchFamily="2" charset="-78"/>
+                <a:ea typeface="Amiri" pitchFamily="2" charset="-78"/>
+                <a:cs typeface="Amiri" pitchFamily="2" charset="-78"/>
+              </a:rPr>
               <a:t>LISTENING TEXT 1 · QUESTIONS 1–4 (website Part A, 20 marks). Before listening: label each question R / C / P / O and write the signal word (P2-L10). Question 2: إِنَّنِي = the speaker. Questions 3–4: idhā (real plan) vs law (counterfactual). Each recording may be played twice; students answer after the second reading.
 SCRIPT: يَقُولُ الطَّالِبُ: بِحُلُولِ نِهَايَةِ الثَّانَوِيَّةِ، كُنْتُ قَدْ قَرَّرْتُ دِرَاسَةَ الهَنْدَسَةِ، وَكُنْتُ قَدْ حَصَلْتُ عَلَى خِبْرَةٍ عَمَلِيَّةٍ فِي البَرْمَجَةِ. قَالَ مُرْشِدِي إِنَّنِي مُؤَهَّلٌ، وَأَكَّدَ أَنَّ اجْتِهَادِي سَيُثْمِرُ. إِذَا قُبِلْتُ فِي الجَامِعَةِ الَّتِي أُرِيدُهَا، سَأَتَخَصَّصُ فِي الطَّاقَةِ المُتَجَدِّدَةِ. وَلَوْ تَوَافَرَتْ لِي مَوَارِدُ أَفْضَلُ مُبَكِّرًا، لَكُنْتُ قَدْ تَقَدَّمْتُ أَسْرَعَ. وَأَشَارَ تَقْرِيرٌ إِلَى أَنَّ نِسْبَةَ القَبُولِ فِي هٰذَا المَجَالِ تَبْلُغُ سِتِّينَ بِالْمِئَةِ. أَرَى أَنَّ ضَغْطَ الامْتِحَانَاتِ كَبِيرٌ، لٰكِنَّهُ يَدْفَعُنِي إِلَى العَمَلِ. وَسَوْفَ أُسْهِمُ فِي مَجَالِي بَعْدَ التَّخَرُّجِ.
 Private chat: 4 letters.</a:t>
@@ -2937,7 +2989,11 @@
           <a:lstStyle/>
           <a:p>
             <a:r>
-              <a:rPr lang="en-US" dirty="0"/>
+              <a:rPr lang="ar-SA" dirty="0">
+                <a:latin typeface="Amiri" pitchFamily="2" charset="-78"/>
+                <a:ea typeface="Amiri" pitchFamily="2" charset="-78"/>
+                <a:cs typeface="Amiri" pitchFamily="2" charset="-78"/>
+              </a:rPr>
               <a:t>Mark /4. Reveal the script only after the attempt; ask which signal (a reporting verb + pronoun · كَانَ قَدْ · إِذَا / لَوْ · أَرَى أَنَّ · a speaker’s name) proved each answer.</a:t>
             </a:r>
             <a:endParaRPr lang="en-US" dirty="0"/>
@@ -3421,6 +3477,7 @@
                   <a:srgbClr val="D4AF37"/>
                 </a:solidFill>
                 <a:latin typeface="Amiri" pitchFamily="2" charset="-78"/>
+                <a:ea typeface="Amiri" pitchFamily="2" charset="-78"/>
                 <a:cs typeface="Amiri" pitchFamily="2" charset="-78"/>
               </a:rPr>
               <a:t>م</a:t>
@@ -3627,6 +3684,7 @@
                   <a:srgbClr val="D4AF37"/>
                 </a:solidFill>
                 <a:latin typeface="Amiri" pitchFamily="2" charset="-78"/>
+                <a:ea typeface="Amiri" pitchFamily="2" charset="-78"/>
                 <a:cs typeface="Amiri" pitchFamily="2" charset="-78"/>
               </a:rPr>
               <a:t>المُرَاجَعَةُ وَتَقْيِيمُ الوَحْدَةِ</a:t>
@@ -4084,6 +4142,7 @@
                   <a:srgbClr val="D4AF37"/>
                 </a:solidFill>
                 <a:latin typeface="Amiri" pitchFamily="2" charset="-78"/>
+                <a:ea typeface="Amiri" pitchFamily="2" charset="-78"/>
                 <a:cs typeface="Amiri" pitchFamily="2" charset="-78"/>
               </a:rPr>
               <a:t>م</a:t>
@@ -4404,6 +4463,7 @@
                   <a:srgbClr val="8A6D1E"/>
                 </a:solidFill>
                 <a:latin typeface="Amiri" pitchFamily="2" charset="-78"/>
+                <a:ea typeface="Amiri" pitchFamily="2" charset="-78"/>
                 <a:cs typeface="Amiri" pitchFamily="2" charset="-78"/>
               </a:rPr>
               <a:t>الاسْتِمَاعُ</a:t>
@@ -6327,6 +6387,7 @@
                   <a:srgbClr val="D4AF37"/>
                 </a:solidFill>
                 <a:latin typeface="Amiri" pitchFamily="2" charset="-78"/>
+                <a:ea typeface="Amiri" pitchFamily="2" charset="-78"/>
                 <a:cs typeface="Amiri" pitchFamily="2" charset="-78"/>
               </a:rPr>
               <a:t>م</a:t>
@@ -6647,6 +6708,7 @@
                   <a:srgbClr val="8A6D1E"/>
                 </a:solidFill>
                 <a:latin typeface="Amiri" pitchFamily="2" charset="-78"/>
+                <a:ea typeface="Amiri" pitchFamily="2" charset="-78"/>
                 <a:cs typeface="Amiri" pitchFamily="2" charset="-78"/>
               </a:rPr>
               <a:t>الإِجَابَاتُ</a:t>
@@ -7188,6 +7250,7 @@
                   <a:srgbClr val="8A6D1E"/>
                 </a:solidFill>
                 <a:latin typeface="Amiri" pitchFamily="2" charset="-78"/>
+                <a:ea typeface="Amiri" pitchFamily="2" charset="-78"/>
                 <a:cs typeface="Amiri" pitchFamily="2" charset="-78"/>
               </a:rPr>
               <a:t>نِسْبَةَ القَبُولِ … تَبْلُغُ سِتِّينَ بِالْمِئَةِ.</a:t>
@@ -7691,6 +7754,7 @@
                   <a:srgbClr val="8A6D1E"/>
                 </a:solidFill>
                 <a:latin typeface="Amiri" pitchFamily="2" charset="-78"/>
+                <a:ea typeface="Amiri" pitchFamily="2" charset="-78"/>
                 <a:cs typeface="Amiri" pitchFamily="2" charset="-78"/>
               </a:rPr>
               <a:t>أَكَّدَ أَنَّ اجْتِهَادِي سَيُثْمِرُ.</a:t>
@@ -8194,6 +8258,7 @@
                   <a:srgbClr val="8A6D1E"/>
                 </a:solidFill>
                 <a:latin typeface="Amiri" pitchFamily="2" charset="-78"/>
+                <a:ea typeface="Amiri" pitchFamily="2" charset="-78"/>
                 <a:cs typeface="Amiri" pitchFamily="2" charset="-78"/>
               </a:rPr>
               <a:t>أَرَى أَنَّ ضَغْطَ الامْتِحَانَاتِ كَبِيرٌ، لٰكِنَّهُ يَدْفَعُنِي إِلَى العَمَلِ.</a:t>
@@ -8697,6 +8762,7 @@
                   <a:srgbClr val="8A6D1E"/>
                 </a:solidFill>
                 <a:latin typeface="Amiri" pitchFamily="2" charset="-78"/>
+                <a:ea typeface="Amiri" pitchFamily="2" charset="-78"/>
                 <a:cs typeface="Amiri" pitchFamily="2" charset="-78"/>
               </a:rPr>
               <a:t>وَسَوْفَ أُسْهِمُ فِي مَجَالِي بَعْدَ التَّخَرُّجِ.</a:t>
@@ -8830,6 +8896,7 @@
                   <a:srgbClr val="D4AF37"/>
                 </a:solidFill>
                 <a:latin typeface="Amiri" pitchFamily="2" charset="-78"/>
+                <a:ea typeface="Amiri" pitchFamily="2" charset="-78"/>
                 <a:cs typeface="Amiri" pitchFamily="2" charset="-78"/>
               </a:rPr>
               <a:t>م</a:t>
@@ -9150,6 +9217,7 @@
                   <a:srgbClr val="8A6D1E"/>
                 </a:solidFill>
                 <a:latin typeface="Amiri" pitchFamily="2" charset="-78"/>
+                <a:ea typeface="Amiri" pitchFamily="2" charset="-78"/>
                 <a:cs typeface="Amiri" pitchFamily="2" charset="-78"/>
               </a:rPr>
               <a:t>الاسْتِمَاعُ</a:t>
@@ -11949,6 +12017,7 @@
                   <a:srgbClr val="D4AF37"/>
                 </a:solidFill>
                 <a:latin typeface="Amiri" pitchFamily="2" charset="-78"/>
+                <a:ea typeface="Amiri" pitchFamily="2" charset="-78"/>
                 <a:cs typeface="Amiri" pitchFamily="2" charset="-78"/>
               </a:rPr>
               <a:t>م</a:t>
@@ -12269,6 +12338,7 @@
                   <a:srgbClr val="8A6D1E"/>
                 </a:solidFill>
                 <a:latin typeface="Amiri" pitchFamily="2" charset="-78"/>
+                <a:ea typeface="Amiri" pitchFamily="2" charset="-78"/>
                 <a:cs typeface="Amiri" pitchFamily="2" charset="-78"/>
               </a:rPr>
               <a:t>الإِجَابَاتُ</a:t>
@@ -12810,6 +12880,7 @@
                   <a:srgbClr val="8A6D1E"/>
                 </a:solidFill>
                 <a:latin typeface="Amiri" pitchFamily="2" charset="-78"/>
+                <a:ea typeface="Amiri" pitchFamily="2" charset="-78"/>
                 <a:cs typeface="Amiri" pitchFamily="2" charset="-78"/>
               </a:rPr>
               <a:t>سَامِي: كَانَ العَالَمُ العَرَبِيُّ قَدْ أَسَّسَ … فِي العَصْرِ الذَّهَبِيِّ.</a:t>
@@ -13313,6 +13384,7 @@
                   <a:srgbClr val="8A6D1E"/>
                 </a:solidFill>
                 <a:latin typeface="Amiri" pitchFamily="2" charset="-78"/>
+                <a:ea typeface="Amiri" pitchFamily="2" charset="-78"/>
                 <a:cs typeface="Amiri" pitchFamily="2" charset="-78"/>
               </a:rPr>
               <a:t>لَيْلَى: أَشَارَ المُؤَرِّخُونَ إِلَى أَنَّ دَارَ الحِكْمَةِ …</a:t>
@@ -13816,6 +13888,7 @@
                   <a:srgbClr val="8A6D1E"/>
                 </a:solidFill>
                 <a:latin typeface="Amiri" pitchFamily="2" charset="-78"/>
+                <a:ea typeface="Amiri" pitchFamily="2" charset="-78"/>
                 <a:cs typeface="Amiri" pitchFamily="2" charset="-78"/>
               </a:rPr>
               <a:t>سَامِي: لٰكِنَّ الإِصْلَاحَ اليَوْمَ ضَرُورِيٌّ.</a:t>
@@ -14319,6 +14392,7 @@
                   <a:srgbClr val="8A6D1E"/>
                 </a:solidFill>
                 <a:latin typeface="Amiri" pitchFamily="2" charset="-78"/>
+                <a:ea typeface="Amiri" pitchFamily="2" charset="-78"/>
                 <a:cs typeface="Amiri" pitchFamily="2" charset="-78"/>
               </a:rPr>
               <a:t>لَيْلَى: قَالَ خَبِيرٌ إِنَّ الاسْتِثْمَارَ فِي المُعَلِّمِ هُوَ الحَلُّ.</a:t>
@@ -14822,6 +14896,7 @@
                   <a:srgbClr val="8A6D1E"/>
                 </a:solidFill>
                 <a:latin typeface="Amiri" pitchFamily="2" charset="-78"/>
+                <a:ea typeface="Amiri" pitchFamily="2" charset="-78"/>
                 <a:cs typeface="Amiri" pitchFamily="2" charset="-78"/>
               </a:rPr>
               <a:t>سَامِي: وَلَوِ اسْتُثْمِرَ مُبَكِّرًا، لَتَغَيَّرَ الوَضْعُ.</a:t>
@@ -15325,6 +15400,7 @@
                   <a:srgbClr val="8A6D1E"/>
                 </a:solidFill>
                 <a:latin typeface="Amiri" pitchFamily="2" charset="-78"/>
+                <a:ea typeface="Amiri" pitchFamily="2" charset="-78"/>
                 <a:cs typeface="Amiri" pitchFamily="2" charset="-78"/>
               </a:rPr>
               <a:t>لَيْلَى: وَأَنَا أَرَى أَنَّ تَعْلِيمَ المَرْأَةِ أَوْلَوِيَّةٌ.</a:t>
@@ -15458,6 +15534,7 @@
                   <a:srgbClr val="D4AF37"/>
                 </a:solidFill>
                 <a:latin typeface="Amiri" pitchFamily="2" charset="-78"/>
+                <a:ea typeface="Amiri" pitchFamily="2" charset="-78"/>
                 <a:cs typeface="Amiri" pitchFamily="2" charset="-78"/>
               </a:rPr>
               <a:t>م</a:t>
@@ -15778,6 +15855,7 @@
                   <a:srgbClr val="8A6D1E"/>
                 </a:solidFill>
                 <a:latin typeface="Amiri" pitchFamily="2" charset="-78"/>
+                <a:ea typeface="Amiri" pitchFamily="2" charset="-78"/>
                 <a:cs typeface="Amiri" pitchFamily="2" charset="-78"/>
               </a:rPr>
               <a:t>الاسْتِمَاعُ</a:t>
@@ -18577,6 +18655,7 @@
                   <a:srgbClr val="D4AF37"/>
                 </a:solidFill>
                 <a:latin typeface="Amiri" pitchFamily="2" charset="-78"/>
+                <a:ea typeface="Amiri" pitchFamily="2" charset="-78"/>
                 <a:cs typeface="Amiri" pitchFamily="2" charset="-78"/>
               </a:rPr>
               <a:t>م</a:t>
@@ -18897,6 +18976,7 @@
                   <a:srgbClr val="8A6D1E"/>
                 </a:solidFill>
                 <a:latin typeface="Amiri" pitchFamily="2" charset="-78"/>
+                <a:ea typeface="Amiri" pitchFamily="2" charset="-78"/>
                 <a:cs typeface="Amiri" pitchFamily="2" charset="-78"/>
               </a:rPr>
               <a:t>الإِجَابَاتُ</a:t>
@@ -19438,6 +19518,7 @@
                   <a:srgbClr val="8A6D1E"/>
                 </a:solidFill>
                 <a:latin typeface="Amiri" pitchFamily="2" charset="-78"/>
+                <a:ea typeface="Amiri" pitchFamily="2" charset="-78"/>
                 <a:cs typeface="Amiri" pitchFamily="2" charset="-78"/>
               </a:rPr>
               <a:t>كَانَتِ الوِزَارَةُ قَدْ أَطْلَقَتْ خُطَّةَ إِصْلَاحٍ قَبْلَ ثَلَاثِ سَنَوَاتٍ.</a:t>
@@ -19941,6 +20022,7 @@
                   <a:srgbClr val="8A6D1E"/>
                 </a:solidFill>
                 <a:latin typeface="Amiri" pitchFamily="2" charset="-78"/>
+                <a:ea typeface="Amiri" pitchFamily="2" charset="-78"/>
                 <a:cs typeface="Amiri" pitchFamily="2" charset="-78"/>
               </a:rPr>
               <a:t>أَكَّدَ أَنَّ نِسْبَةَ الالْتِحَاقِ ارْتَفَعَتْ بَعْدَ الإِصْلَاحِ.</a:t>
@@ -20444,6 +20526,7 @@
                   <a:srgbClr val="8A6D1E"/>
                 </a:solidFill>
                 <a:latin typeface="Amiri" pitchFamily="2" charset="-78"/>
+                <a:ea typeface="Amiri" pitchFamily="2" charset="-78"/>
                 <a:cs typeface="Amiri" pitchFamily="2" charset="-78"/>
               </a:rPr>
               <a:t>أَشَارَ إِلَى أَنَّ الفَجْوَةَ بَيْنَ المَنَاطِقِ مَا زَالَتْ قَائِمَةً.</a:t>
@@ -20947,6 +21030,7 @@
                   <a:srgbClr val="8A6D1E"/>
                 </a:solidFill>
                 <a:latin typeface="Amiri" pitchFamily="2" charset="-78"/>
+                <a:ea typeface="Amiri" pitchFamily="2" charset="-78"/>
                 <a:cs typeface="Amiri" pitchFamily="2" charset="-78"/>
               </a:rPr>
               <a:t>إِذَا اسْتَمَرَّ الاسْتِثْمَارُ، سَتَتَقَلَّصُ الفَجْوَةُ.</a:t>
@@ -21450,6 +21534,7 @@
                   <a:srgbClr val="8A6D1E"/>
                 </a:solidFill>
                 <a:latin typeface="Amiri" pitchFamily="2" charset="-78"/>
+                <a:ea typeface="Amiri" pitchFamily="2" charset="-78"/>
                 <a:cs typeface="Amiri" pitchFamily="2" charset="-78"/>
               </a:rPr>
               <a:t>اعْتَرَفَ بِأَنَّ تَدْرِيبَ المُعَلِّمِينَ يَحْتَاجُ إِلَى وَقْتٍ.</a:t>
@@ -21953,6 +22038,7 @@
                   <a:srgbClr val="8A6D1E"/>
                 </a:solidFill>
                 <a:latin typeface="Amiri" pitchFamily="2" charset="-78"/>
+                <a:ea typeface="Amiri" pitchFamily="2" charset="-78"/>
                 <a:cs typeface="Amiri" pitchFamily="2" charset="-78"/>
               </a:rPr>
               <a:t>لَوْ تَوَافَرَتْ مِيزَانِيَّةٌ أَكْبَرُ، لَكَانَ التَّقَدُّمُ أَسْرَعَ.</a:t>
@@ -22086,6 +22172,7 @@
                   <a:srgbClr val="D4AF37"/>
                 </a:solidFill>
                 <a:latin typeface="Amiri" pitchFamily="2" charset="-78"/>
+                <a:ea typeface="Amiri" pitchFamily="2" charset="-78"/>
                 <a:cs typeface="Amiri" pitchFamily="2" charset="-78"/>
               </a:rPr>
               <a:t>م</a:t>
@@ -22406,6 +22493,7 @@
                   <a:srgbClr val="8A6D1E"/>
                 </a:solidFill>
                 <a:latin typeface="Amiri" pitchFamily="2" charset="-78"/>
+                <a:ea typeface="Amiri" pitchFamily="2" charset="-78"/>
                 <a:cs typeface="Amiri" pitchFamily="2" charset="-78"/>
               </a:rPr>
               <a:t>طَلَبُ الالْتِحَاقِ بِالجَامِعَةِ</a:t>
@@ -22519,6 +22607,7 @@
                   <a:srgbClr val="1F2A37"/>
                 </a:solidFill>
                 <a:latin typeface="Amiri" pitchFamily="2" charset="-78"/>
+                <a:ea typeface="Amiri" pitchFamily="2" charset="-78"/>
                 <a:cs typeface="Amiri" pitchFamily="2" charset="-78"/>
               </a:rPr>
               <a:t>أَتَقَدَّمُ بِطَلَبِ الالْتِحَاقِ بِكُلِّيَّةِ الطِّبِّ. كُنْتُ قَدْ قَرَّرْتُ هٰذَا المَسَارَ مُنْذُ المَرْحَلَةِ الإِعْدَادِيَّةِ، وَبِحُلُولِ الثَّانَوِيَّةِ كُنْتُ قَدْ أَنْجَزْتُ مَشْرُوعًا بَحْثِيًّا فِي عِلْمِ الأَحْيَاءِ. وَقَدْ قَالَ أُسْتَاذِي إِنَّنِي مُؤَهَّلٌ، وَأَكَّدَ أَنَّ اجْتِهَادِي سَيُثْمِرُ. إِذَا قُبِلْتُ، سَأُكَرِّسُ جُهْدِي لِلْبَحْثِ العِلْمِيِّ. وَلَوْ تَوَافَرَتْ لِي فُرَصٌ بَحْثِيَّةٌ مُبَكِّرًا، لَكُنْتُ قَدْ نَشَرْتُ دِرَاسَةً بِالفِعْلِ. أَطْمَحُ إِلَى خِدْمَةِ مُجْتَمَعِي، وَأَرَى أَنَّ الطِّبَّ رِسَالَةٌ لَا مِهْنَةٌ فَقَطْ. وَسَوْفَ أُوَاصِلُ تَطْوِيرَ مَهَارَاتِي طَوَالَ حَيَاتِي.</a:t>
@@ -22652,6 +22741,7 @@
                   <a:srgbClr val="D4AF37"/>
                 </a:solidFill>
                 <a:latin typeface="Amiri" pitchFamily="2" charset="-78"/>
+                <a:ea typeface="Amiri" pitchFamily="2" charset="-78"/>
                 <a:cs typeface="Amiri" pitchFamily="2" charset="-78"/>
               </a:rPr>
               <a:t>م</a:t>
@@ -22972,6 +23062,7 @@
                   <a:srgbClr val="8A6D1E"/>
                 </a:solidFill>
                 <a:latin typeface="Amiri" pitchFamily="2" charset="-78"/>
+                <a:ea typeface="Amiri" pitchFamily="2" charset="-78"/>
                 <a:cs typeface="Amiri" pitchFamily="2" charset="-78"/>
               </a:rPr>
               <a:t>أَسْئِلَةُ القِرَاءَةِ</a:t>
@@ -24910,6 +25001,7 @@
                   <a:srgbClr val="1B3B6F"/>
                 </a:solidFill>
                 <a:latin typeface="Amiri" pitchFamily="2" charset="-78"/>
+                <a:ea typeface="Amiri" pitchFamily="2" charset="-78"/>
                 <a:cs typeface="Amiri" pitchFamily="2" charset="-78"/>
               </a:rPr>
               <a:t>لَوْ</a:t>
@@ -25024,6 +25116,7 @@
                   <a:srgbClr val="1F2A37"/>
                 </a:solidFill>
                 <a:latin typeface="Amiri" pitchFamily="2" charset="-78"/>
+                <a:ea typeface="Amiri" pitchFamily="2" charset="-78"/>
                 <a:cs typeface="Amiri" pitchFamily="2" charset="-78"/>
               </a:rPr>
               <a:t>إِذَا قُبِلْتُ، سَأُكَرِّسُ جُهْدِي</a:t>
@@ -25125,6 +25218,7 @@
                   <a:srgbClr val="1F2A37"/>
                 </a:solidFill>
                 <a:latin typeface="Amiri" pitchFamily="2" charset="-78"/>
+                <a:ea typeface="Amiri" pitchFamily="2" charset="-78"/>
                 <a:cs typeface="Amiri" pitchFamily="2" charset="-78"/>
               </a:rPr>
               <a:t>لَوْ تَوَافَرَتْ لِي فُرَصٌ بَحْثِيَّةٌ مُبَكِّرًا، لَكُنْتُ قَدْ نَشَرْتُ دِرَاسَةً</a:t>
@@ -25226,6 +25320,7 @@
                   <a:srgbClr val="1F2A37"/>
                 </a:solidFill>
                 <a:latin typeface="Amiri" pitchFamily="2" charset="-78"/>
+                <a:ea typeface="Amiri" pitchFamily="2" charset="-78"/>
                 <a:cs typeface="Amiri" pitchFamily="2" charset="-78"/>
               </a:rPr>
               <a:t>كُنْتُ قَدْ أَنْجَزْتُ مَشْرُوعًا</a:t>
@@ -25359,6 +25454,7 @@
                   <a:srgbClr val="D4AF37"/>
                 </a:solidFill>
                 <a:latin typeface="Amiri" pitchFamily="2" charset="-78"/>
+                <a:ea typeface="Amiri" pitchFamily="2" charset="-78"/>
                 <a:cs typeface="Amiri" pitchFamily="2" charset="-78"/>
               </a:rPr>
               <a:t>م</a:t>
@@ -25679,6 +25775,7 @@
                   <a:srgbClr val="8A6D1E"/>
                 </a:solidFill>
                 <a:latin typeface="Amiri" pitchFamily="2" charset="-78"/>
+                <a:ea typeface="Amiri" pitchFamily="2" charset="-78"/>
                 <a:cs typeface="Amiri" pitchFamily="2" charset="-78"/>
               </a:rPr>
               <a:t>الإِجَابَاتُ</a:t>
@@ -26220,6 +26317,7 @@
                   <a:srgbClr val="8A6D1E"/>
                 </a:solidFill>
                 <a:latin typeface="Amiri" pitchFamily="2" charset="-78"/>
+                <a:ea typeface="Amiri" pitchFamily="2" charset="-78"/>
                 <a:cs typeface="Amiri" pitchFamily="2" charset="-78"/>
               </a:rPr>
               <a:t>أَتَقَدَّمُ بِطَلَبِ الالْتِحَاقِ بِكُلِّيَّةِ الطِّبِّ.</a:t>
@@ -26723,6 +26821,7 @@
                   <a:srgbClr val="8A6D1E"/>
                 </a:solidFill>
                 <a:latin typeface="Amiri" pitchFamily="2" charset="-78"/>
+                <a:ea typeface="Amiri" pitchFamily="2" charset="-78"/>
                 <a:cs typeface="Amiri" pitchFamily="2" charset="-78"/>
               </a:rPr>
               <a:t>بِحُلُولِ الثَّانَوِيَّةِ كُنْتُ قَدْ أَنْجَزْتُ مَشْرُوعًا بَحْثِيًّا فِي عِلْمِ الأَحْيَاءِ.</a:t>
@@ -27226,6 +27325,7 @@
                   <a:srgbClr val="8A6D1E"/>
                 </a:solidFill>
                 <a:latin typeface="Amiri" pitchFamily="2" charset="-78"/>
+                <a:ea typeface="Amiri" pitchFamily="2" charset="-78"/>
                 <a:cs typeface="Amiri" pitchFamily="2" charset="-78"/>
               </a:rPr>
               <a:t>إِذَا قُبِلْتُ، سَأُكَرِّسُ جُهْدِي لِلْبَحْثِ العِلْمِيِّ.</a:t>
@@ -27729,6 +27829,7 @@
                   <a:srgbClr val="8A6D1E"/>
                 </a:solidFill>
                 <a:latin typeface="Amiri" pitchFamily="2" charset="-78"/>
+                <a:ea typeface="Amiri" pitchFamily="2" charset="-78"/>
                 <a:cs typeface="Amiri" pitchFamily="2" charset="-78"/>
               </a:rPr>
               <a:t>أَطْمَحُ إِلَى خِدْمَةِ مُجْتَمَعِي.</a:t>
@@ -27877,6 +27978,7 @@
                   <a:srgbClr val="1B3B6F"/>
                 </a:solidFill>
                 <a:latin typeface="Amiri" pitchFamily="2" charset="-78"/>
+                <a:ea typeface="Amiri" pitchFamily="2" charset="-78"/>
                 <a:cs typeface="Amiri" pitchFamily="2" charset="-78"/>
               </a:rPr>
               <a:t>لَوْ</a:t>
@@ -27991,6 +28093,7 @@
                   <a:srgbClr val="9AA1AB"/>
                 </a:solidFill>
                 <a:latin typeface="Amiri" pitchFamily="2" charset="-78"/>
+                <a:ea typeface="Amiri" pitchFamily="2" charset="-78"/>
                 <a:cs typeface="Amiri" pitchFamily="2" charset="-78"/>
               </a:rPr>
               <a:t>إِذَا قُبِلْتُ، سَأُكَرِّسُ جُهْدِي</a:t>
@@ -28119,6 +28222,7 @@
                   <a:srgbClr val="1F2A37"/>
                 </a:solidFill>
                 <a:latin typeface="Amiri" pitchFamily="2" charset="-78"/>
+                <a:ea typeface="Amiri" pitchFamily="2" charset="-78"/>
                 <a:cs typeface="Amiri" pitchFamily="2" charset="-78"/>
               </a:rPr>
               <a:t>لَوْ تَوَافَرَتْ لِي فُرَصٌ بَحْثِيَّةٌ مُبَكِّرًا، لَكُنْتُ قَدْ نَشَرْتُ دِرَاسَةً</a:t>
@@ -28220,6 +28324,7 @@
                   <a:srgbClr val="9AA1AB"/>
                 </a:solidFill>
                 <a:latin typeface="Amiri" pitchFamily="2" charset="-78"/>
+                <a:ea typeface="Amiri" pitchFamily="2" charset="-78"/>
                 <a:cs typeface="Amiri" pitchFamily="2" charset="-78"/>
               </a:rPr>
               <a:t>كُنْتُ قَدْ أَنْجَزْتُ مَشْرُوعًا</a:t>
@@ -28258,6 +28363,7 @@
                   <a:srgbClr val="8A6D1E"/>
                 </a:solidFill>
                 <a:latin typeface="Amiri" pitchFamily="2" charset="-78"/>
+                <a:ea typeface="Amiri" pitchFamily="2" charset="-78"/>
                 <a:cs typeface="Amiri" pitchFamily="2" charset="-78"/>
               </a:rPr>
               <a:t>لَوْ … لَـ</a:t>
@@ -28404,6 +28510,7 @@
                   <a:srgbClr val="D4AF37"/>
                 </a:solidFill>
                 <a:latin typeface="Amiri" pitchFamily="2" charset="-78"/>
+                <a:ea typeface="Amiri" pitchFamily="2" charset="-78"/>
                 <a:cs typeface="Amiri" pitchFamily="2" charset="-78"/>
               </a:rPr>
               <a:t>م</a:t>
@@ -28724,6 +28831,7 @@
                   <a:srgbClr val="8A6D1E"/>
                 </a:solidFill>
                 <a:latin typeface="Amiri" pitchFamily="2" charset="-78"/>
+                <a:ea typeface="Amiri" pitchFamily="2" charset="-78"/>
                 <a:cs typeface="Amiri" pitchFamily="2" charset="-78"/>
               </a:rPr>
               <a:t>أَسْئِلَةُ القِرَاءَةِ</a:t>
@@ -28910,6 +29018,7 @@
                   <a:srgbClr val="1B3B6F"/>
                 </a:solidFill>
                 <a:latin typeface="Amiri" pitchFamily="2" charset="-78"/>
+                <a:ea typeface="Amiri" pitchFamily="2" charset="-78"/>
                 <a:cs typeface="Amiri" pitchFamily="2" charset="-78"/>
               </a:rPr>
               <a:t>لَوْ</a:t>
@@ -29462,6 +29571,7 @@
                   <a:srgbClr val="1F2A37"/>
                 </a:solidFill>
                 <a:latin typeface="Amiri" pitchFamily="2" charset="-78"/>
+                <a:ea typeface="Amiri" pitchFamily="2" charset="-78"/>
                 <a:cs typeface="Amiri" pitchFamily="2" charset="-78"/>
               </a:rPr>
               <a:t>إِذَا قُبِلْتُ سَأُكَرِّسُ جُهْدِي</a:t>
@@ -29563,6 +29673,7 @@
                   <a:srgbClr val="1F2A37"/>
                 </a:solidFill>
                 <a:latin typeface="Amiri" pitchFamily="2" charset="-78"/>
+                <a:ea typeface="Amiri" pitchFamily="2" charset="-78"/>
                 <a:cs typeface="Amiri" pitchFamily="2" charset="-78"/>
               </a:rPr>
               <a:t>أَرَى أَنَّ الطِّبَّ رِسَالَةٌ</a:t>
@@ -29664,6 +29775,7 @@
                   <a:srgbClr val="1F2A37"/>
                 </a:solidFill>
                 <a:latin typeface="Amiri" pitchFamily="2" charset="-78"/>
+                <a:ea typeface="Amiri" pitchFamily="2" charset="-78"/>
                 <a:cs typeface="Amiri" pitchFamily="2" charset="-78"/>
               </a:rPr>
               <a:t>كُنْتُ قَدْ قَرَّرْتُ هٰذَا المَسَارَ مُنْذُ الإِعْدَادِيَّةِ</a:t>
@@ -29812,6 +29924,7 @@
                   <a:srgbClr val="1B3B6F"/>
                 </a:solidFill>
                 <a:latin typeface="Amiri" pitchFamily="2" charset="-78"/>
+                <a:ea typeface="Amiri" pitchFamily="2" charset="-78"/>
                 <a:cs typeface="Amiri" pitchFamily="2" charset="-78"/>
               </a:rPr>
               <a:t>مُؤَهَّلٌ</a:t>
@@ -30276,6 +30389,7 @@
                   <a:srgbClr val="1B3B6F"/>
                 </a:solidFill>
                 <a:latin typeface="Amiri" pitchFamily="2" charset="-78"/>
+                <a:ea typeface="Amiri" pitchFamily="2" charset="-78"/>
                 <a:cs typeface="Amiri" pitchFamily="2" charset="-78"/>
               </a:rPr>
               <a:t>أُسْتَاذِي إِنَّنِي مُؤَهَّلٌ</a:t>
@@ -30390,6 +30504,7 @@
                   <a:srgbClr val="1F2A37"/>
                 </a:solidFill>
                 <a:latin typeface="Amiri" pitchFamily="2" charset="-78"/>
+                <a:ea typeface="Amiri" pitchFamily="2" charset="-78"/>
                 <a:cs typeface="Amiri" pitchFamily="2" charset="-78"/>
               </a:rPr>
               <a:t>أَشَارَ</a:t>
@@ -30491,6 +30606,7 @@
                   <a:srgbClr val="1F2A37"/>
                 </a:solidFill>
                 <a:latin typeface="Amiri" pitchFamily="2" charset="-78"/>
+                <a:ea typeface="Amiri" pitchFamily="2" charset="-78"/>
                 <a:cs typeface="Amiri" pitchFamily="2" charset="-78"/>
               </a:rPr>
               <a:t>قَالَ</a:t>
@@ -30592,6 +30708,7 @@
                   <a:srgbClr val="1F2A37"/>
                 </a:solidFill>
                 <a:latin typeface="Amiri" pitchFamily="2" charset="-78"/>
+                <a:ea typeface="Amiri" pitchFamily="2" charset="-78"/>
                 <a:cs typeface="Amiri" pitchFamily="2" charset="-78"/>
               </a:rPr>
               <a:t>اعْتَرَفَ</a:t>
@@ -30740,6 +30857,7 @@
                   <a:srgbClr val="1B3B6F"/>
                 </a:solidFill>
                 <a:latin typeface="Amiri" pitchFamily="2" charset="-78"/>
+                <a:ea typeface="Amiri" pitchFamily="2" charset="-78"/>
                 <a:cs typeface="Amiri" pitchFamily="2" charset="-78"/>
               </a:rPr>
               <a:t>وَ</a:t>
@@ -30766,6 +30884,7 @@
                   <a:srgbClr val="1B3B6F"/>
                 </a:solidFill>
                 <a:latin typeface="Amiri" pitchFamily="2" charset="-78"/>
+                <a:ea typeface="Amiri" pitchFamily="2" charset="-78"/>
                 <a:cs typeface="Amiri" pitchFamily="2" charset="-78"/>
               </a:rPr>
               <a:t>أَنَّ اجْتِهَادِي سَيُثْمِرُ</a:t>
@@ -30880,6 +30999,7 @@
                   <a:srgbClr val="1F2A37"/>
                 </a:solidFill>
                 <a:latin typeface="Amiri" pitchFamily="2" charset="-78"/>
+                <a:ea typeface="Amiri" pitchFamily="2" charset="-78"/>
                 <a:cs typeface="Amiri" pitchFamily="2" charset="-78"/>
               </a:rPr>
               <a:t>أَكَّدَ</a:t>
@@ -30981,6 +31101,7 @@
                   <a:srgbClr val="1F2A37"/>
                 </a:solidFill>
                 <a:latin typeface="Amiri" pitchFamily="2" charset="-78"/>
+                <a:ea typeface="Amiri" pitchFamily="2" charset="-78"/>
                 <a:cs typeface="Amiri" pitchFamily="2" charset="-78"/>
               </a:rPr>
               <a:t>قَالَ</a:t>
@@ -31082,6 +31203,7 @@
                   <a:srgbClr val="1F2A37"/>
                 </a:solidFill>
                 <a:latin typeface="Amiri" pitchFamily="2" charset="-78"/>
+                <a:ea typeface="Amiri" pitchFamily="2" charset="-78"/>
                 <a:cs typeface="Amiri" pitchFamily="2" charset="-78"/>
               </a:rPr>
               <a:t>إِنَّ</a:t>
@@ -31215,6 +31337,7 @@
                   <a:srgbClr val="D4AF37"/>
                 </a:solidFill>
                 <a:latin typeface="Amiri" pitchFamily="2" charset="-78"/>
+                <a:ea typeface="Amiri" pitchFamily="2" charset="-78"/>
                 <a:cs typeface="Amiri" pitchFamily="2" charset="-78"/>
               </a:rPr>
               <a:t>م</a:t>
@@ -31535,6 +31658,7 @@
                   <a:srgbClr val="8A6D1E"/>
                 </a:solidFill>
                 <a:latin typeface="Amiri" pitchFamily="2" charset="-78"/>
+                <a:ea typeface="Amiri" pitchFamily="2" charset="-78"/>
                 <a:cs typeface="Amiri" pitchFamily="2" charset="-78"/>
               </a:rPr>
               <a:t>آدَابُ الصَّفِّ</a:t>
@@ -33066,6 +33190,7 @@
                   <a:srgbClr val="D4AF37"/>
                 </a:solidFill>
                 <a:latin typeface="Amiri" pitchFamily="2" charset="-78"/>
+                <a:ea typeface="Amiri" pitchFamily="2" charset="-78"/>
                 <a:cs typeface="Amiri" pitchFamily="2" charset="-78"/>
               </a:rPr>
               <a:t>م</a:t>
@@ -33386,6 +33511,7 @@
                   <a:srgbClr val="8A6D1E"/>
                 </a:solidFill>
                 <a:latin typeface="Amiri" pitchFamily="2" charset="-78"/>
+                <a:ea typeface="Amiri" pitchFamily="2" charset="-78"/>
                 <a:cs typeface="Amiri" pitchFamily="2" charset="-78"/>
               </a:rPr>
               <a:t>الإِجَابَاتُ</a:t>
@@ -33572,6 +33698,7 @@
                   <a:srgbClr val="1B3B6F"/>
                 </a:solidFill>
                 <a:latin typeface="Amiri" pitchFamily="2" charset="-78"/>
+                <a:ea typeface="Amiri" pitchFamily="2" charset="-78"/>
                 <a:cs typeface="Amiri" pitchFamily="2" charset="-78"/>
               </a:rPr>
               <a:t>لَوْ</a:t>
@@ -34189,6 +34316,7 @@
                   <a:srgbClr val="9AA1AB"/>
                 </a:solidFill>
                 <a:latin typeface="Amiri" pitchFamily="2" charset="-78"/>
+                <a:ea typeface="Amiri" pitchFamily="2" charset="-78"/>
                 <a:cs typeface="Amiri" pitchFamily="2" charset="-78"/>
               </a:rPr>
               <a:t>إِذَا قُبِلْتُ سَأُكَرِّسُ جُهْدِي</a:t>
@@ -34290,6 +34418,7 @@
                   <a:srgbClr val="9AA1AB"/>
                 </a:solidFill>
                 <a:latin typeface="Amiri" pitchFamily="2" charset="-78"/>
+                <a:ea typeface="Amiri" pitchFamily="2" charset="-78"/>
                 <a:cs typeface="Amiri" pitchFamily="2" charset="-78"/>
               </a:rPr>
               <a:t>أَرَى أَنَّ الطِّبَّ رِسَالَةٌ</a:t>
@@ -34418,6 +34547,7 @@
                   <a:srgbClr val="1F2A37"/>
                 </a:solidFill>
                 <a:latin typeface="Amiri" pitchFamily="2" charset="-78"/>
+                <a:ea typeface="Amiri" pitchFamily="2" charset="-78"/>
                 <a:cs typeface="Amiri" pitchFamily="2" charset="-78"/>
               </a:rPr>
               <a:t>كُنْتُ قَدْ قَرَّرْتُ هٰذَا المَسَارَ مُنْذُ الإِعْدَادِيَّةِ</a:t>
@@ -34456,6 +34586,7 @@
                   <a:srgbClr val="8A6D1E"/>
                 </a:solidFill>
                 <a:latin typeface="Amiri" pitchFamily="2" charset="-78"/>
+                <a:ea typeface="Amiri" pitchFamily="2" charset="-78"/>
                 <a:cs typeface="Amiri" pitchFamily="2" charset="-78"/>
               </a:rPr>
               <a:t>كُنْتُ قَدْ</a:t>
@@ -34617,6 +34748,7 @@
                   <a:srgbClr val="1B3B6F"/>
                 </a:solidFill>
                 <a:latin typeface="Amiri" pitchFamily="2" charset="-78"/>
+                <a:ea typeface="Amiri" pitchFamily="2" charset="-78"/>
                 <a:cs typeface="Amiri" pitchFamily="2" charset="-78"/>
               </a:rPr>
               <a:t>مُؤَهَّلٌ</a:t>
@@ -34998,6 +35130,7 @@
                   <a:srgbClr val="8A6D1E"/>
                 </a:solidFill>
                 <a:latin typeface="Amiri" pitchFamily="2" charset="-78"/>
+                <a:ea typeface="Amiri" pitchFamily="2" charset="-78"/>
                 <a:cs typeface="Amiri" pitchFamily="2" charset="-78"/>
               </a:rPr>
               <a:t>قَالَ أُسْتَاذِي إِنَّنِي مُؤَهَّلٌ</a:t>
@@ -35159,6 +35292,7 @@
                   <a:srgbClr val="1B3B6F"/>
                 </a:solidFill>
                 <a:latin typeface="Amiri" pitchFamily="2" charset="-78"/>
+                <a:ea typeface="Amiri" pitchFamily="2" charset="-78"/>
                 <a:cs typeface="Amiri" pitchFamily="2" charset="-78"/>
               </a:rPr>
               <a:t>أُسْتَاذِي إِنَّنِي مُؤَهَّلٌ</a:t>
@@ -35273,6 +35407,7 @@
                   <a:srgbClr val="9AA1AB"/>
                 </a:solidFill>
                 <a:latin typeface="Amiri" pitchFamily="2" charset="-78"/>
+                <a:ea typeface="Amiri" pitchFamily="2" charset="-78"/>
                 <a:cs typeface="Amiri" pitchFamily="2" charset="-78"/>
               </a:rPr>
               <a:t>أَشَارَ</a:t>
@@ -35401,6 +35536,7 @@
                   <a:srgbClr val="1F2A37"/>
                 </a:solidFill>
                 <a:latin typeface="Amiri" pitchFamily="2" charset="-78"/>
+                <a:ea typeface="Amiri" pitchFamily="2" charset="-78"/>
                 <a:cs typeface="Amiri" pitchFamily="2" charset="-78"/>
               </a:rPr>
               <a:t>قَالَ</a:t>
@@ -35502,6 +35638,7 @@
                   <a:srgbClr val="9AA1AB"/>
                 </a:solidFill>
                 <a:latin typeface="Amiri" pitchFamily="2" charset="-78"/>
+                <a:ea typeface="Amiri" pitchFamily="2" charset="-78"/>
                 <a:cs typeface="Amiri" pitchFamily="2" charset="-78"/>
               </a:rPr>
               <a:t>اعْتَرَفَ</a:t>
@@ -35540,6 +35677,7 @@
                   <a:srgbClr val="8A6D1E"/>
                 </a:solidFill>
                 <a:latin typeface="Amiri" pitchFamily="2" charset="-78"/>
+                <a:ea typeface="Amiri" pitchFamily="2" charset="-78"/>
                 <a:cs typeface="Amiri" pitchFamily="2" charset="-78"/>
               </a:rPr>
               <a:t>إِنَّ</a:t>
@@ -35566,6 +35704,7 @@
                   <a:srgbClr val="8A6D1E"/>
                 </a:solidFill>
                 <a:latin typeface="Amiri" pitchFamily="2" charset="-78"/>
+                <a:ea typeface="Amiri" pitchFamily="2" charset="-78"/>
                 <a:cs typeface="Amiri" pitchFamily="2" charset="-78"/>
               </a:rPr>
               <a:t>قَالَ</a:t>
@@ -35592,6 +35731,7 @@
                   <a:srgbClr val="8A6D1E"/>
                 </a:solidFill>
                 <a:latin typeface="Amiri" pitchFamily="2" charset="-78"/>
+                <a:ea typeface="Amiri" pitchFamily="2" charset="-78"/>
                 <a:cs typeface="Amiri" pitchFamily="2" charset="-78"/>
               </a:rPr>
               <a:t>أَنَّ</a:t>
@@ -35753,6 +35893,7 @@
                   <a:srgbClr val="1B3B6F"/>
                 </a:solidFill>
                 <a:latin typeface="Amiri" pitchFamily="2" charset="-78"/>
+                <a:ea typeface="Amiri" pitchFamily="2" charset="-78"/>
                 <a:cs typeface="Amiri" pitchFamily="2" charset="-78"/>
               </a:rPr>
               <a:t>وَ</a:t>
@@ -35779,6 +35920,7 @@
                   <a:srgbClr val="1B3B6F"/>
                 </a:solidFill>
                 <a:latin typeface="Amiri" pitchFamily="2" charset="-78"/>
+                <a:ea typeface="Amiri" pitchFamily="2" charset="-78"/>
                 <a:cs typeface="Amiri" pitchFamily="2" charset="-78"/>
               </a:rPr>
               <a:t>أَنَّ اجْتِهَادِي سَيُثْمِرُ</a:t>
@@ -35920,6 +36062,7 @@
                   <a:srgbClr val="1F2A37"/>
                 </a:solidFill>
                 <a:latin typeface="Amiri" pitchFamily="2" charset="-78"/>
+                <a:ea typeface="Amiri" pitchFamily="2" charset="-78"/>
                 <a:cs typeface="Amiri" pitchFamily="2" charset="-78"/>
               </a:rPr>
               <a:t>أَكَّدَ</a:t>
@@ -36021,6 +36164,7 @@
                   <a:srgbClr val="9AA1AB"/>
                 </a:solidFill>
                 <a:latin typeface="Amiri" pitchFamily="2" charset="-78"/>
+                <a:ea typeface="Amiri" pitchFamily="2" charset="-78"/>
                 <a:cs typeface="Amiri" pitchFamily="2" charset="-78"/>
               </a:rPr>
               <a:t>قَالَ</a:t>
@@ -36122,6 +36266,7 @@
                   <a:srgbClr val="9AA1AB"/>
                 </a:solidFill>
                 <a:latin typeface="Amiri" pitchFamily="2" charset="-78"/>
+                <a:ea typeface="Amiri" pitchFamily="2" charset="-78"/>
                 <a:cs typeface="Amiri" pitchFamily="2" charset="-78"/>
               </a:rPr>
               <a:t>إِنَّ</a:t>
@@ -36160,6 +36305,7 @@
                   <a:srgbClr val="8A6D1E"/>
                 </a:solidFill>
                 <a:latin typeface="Amiri" pitchFamily="2" charset="-78"/>
+                <a:ea typeface="Amiri" pitchFamily="2" charset="-78"/>
                 <a:cs typeface="Amiri" pitchFamily="2" charset="-78"/>
               </a:rPr>
               <a:t>أَنَّ</a:t>
@@ -36186,6 +36332,7 @@
                   <a:srgbClr val="8A6D1E"/>
                 </a:solidFill>
                 <a:latin typeface="Amiri" pitchFamily="2" charset="-78"/>
+                <a:ea typeface="Amiri" pitchFamily="2" charset="-78"/>
                 <a:cs typeface="Amiri" pitchFamily="2" charset="-78"/>
               </a:rPr>
               <a:t>قَالَ</a:t>
@@ -36212,6 +36359,7 @@
                   <a:srgbClr val="8A6D1E"/>
                 </a:solidFill>
                 <a:latin typeface="Amiri" pitchFamily="2" charset="-78"/>
+                <a:ea typeface="Amiri" pitchFamily="2" charset="-78"/>
                 <a:cs typeface="Amiri" pitchFamily="2" charset="-78"/>
               </a:rPr>
               <a:t>أَكَّدَ</a:t>
@@ -36358,6 +36506,7 @@
                   <a:srgbClr val="D4AF37"/>
                 </a:solidFill>
                 <a:latin typeface="Amiri" pitchFamily="2" charset="-78"/>
+                <a:ea typeface="Amiri" pitchFamily="2" charset="-78"/>
                 <a:cs typeface="Amiri" pitchFamily="2" charset="-78"/>
               </a:rPr>
               <a:t>م</a:t>
@@ -36678,6 +36827,7 @@
                   <a:srgbClr val="8A6D1E"/>
                 </a:solidFill>
                 <a:latin typeface="Amiri" pitchFamily="2" charset="-78"/>
+                <a:ea typeface="Amiri" pitchFamily="2" charset="-78"/>
                 <a:cs typeface="Amiri" pitchFamily="2" charset="-78"/>
               </a:rPr>
               <a:t>اسْتِمَارَةُ الالْتِحَاقِ</a:t>
@@ -36958,6 +37108,7 @@
                   <a:srgbClr val="1B3B6F"/>
                 </a:solidFill>
                 <a:latin typeface="Amiri" pitchFamily="2" charset="-78"/>
+                <a:ea typeface="Amiri" pitchFamily="2" charset="-78"/>
                 <a:cs typeface="Amiri" pitchFamily="2" charset="-78"/>
               </a:rPr>
               <a:t>الشَّهَادَةُ أَوِ التَّخَصُّصُ الَّذِي تَسْعَى إِلَيْهِ</a:t>
@@ -37164,6 +37315,7 @@
                   <a:srgbClr val="1B3B6F"/>
                 </a:solidFill>
                 <a:latin typeface="Amiri" pitchFamily="2" charset="-78"/>
+                <a:ea typeface="Amiri" pitchFamily="2" charset="-78"/>
                 <a:cs typeface="Amiri" pitchFamily="2" charset="-78"/>
               </a:rPr>
               <a:t>إِنْجَازٌ سَابِقٌ بِاسْتِعْمَالِ «كُنْتُ قَدْ …»</a:t>
@@ -37370,6 +37522,7 @@
                   <a:srgbClr val="1B3B6F"/>
                 </a:solidFill>
                 <a:latin typeface="Amiri" pitchFamily="2" charset="-78"/>
+                <a:ea typeface="Amiri" pitchFamily="2" charset="-78"/>
                 <a:cs typeface="Amiri" pitchFamily="2" charset="-78"/>
               </a:rPr>
               <a:t>تَوْصِيَةُ مُعَلِّمِكَ بِاسْتِعْمَالِ الكَلَامِ المَنْقُولِ</a:t>
@@ -37576,6 +37729,7 @@
                   <a:srgbClr val="1B3B6F"/>
                 </a:solidFill>
                 <a:latin typeface="Amiri" pitchFamily="2" charset="-78"/>
+                <a:ea typeface="Amiri" pitchFamily="2" charset="-78"/>
                 <a:cs typeface="Amiri" pitchFamily="2" charset="-78"/>
               </a:rPr>
               <a:t>خُطَّةٌ شَرْطِيَّةٌ إِنْ قُبِلْتَ</a:t>
@@ -37782,6 +37936,7 @@
                   <a:srgbClr val="1B3B6F"/>
                 </a:solidFill>
                 <a:latin typeface="Amiri" pitchFamily="2" charset="-78"/>
+                <a:ea typeface="Amiri" pitchFamily="2" charset="-78"/>
                 <a:cs typeface="Amiri" pitchFamily="2" charset="-78"/>
               </a:rPr>
               <a:t>طُمُوحٌ مُسْتَقْبَلِيٌّ وَاحِدٌ</a:t>
@@ -37936,6 +38091,7 @@
                   <a:srgbClr val="1B3B6F"/>
                 </a:solidFill>
                 <a:latin typeface="Amiri" pitchFamily="2" charset="-78"/>
+                <a:ea typeface="Amiri" pitchFamily="2" charset="-78"/>
                 <a:cs typeface="Amiri" pitchFamily="2" charset="-78"/>
               </a:rPr>
               <a:t>بَكَالُورْيُوسُ الهَنْدَسَةِ</a:t>
@@ -37962,6 +38118,7 @@
                   <a:srgbClr val="1B3B6F"/>
                 </a:solidFill>
                 <a:latin typeface="Amiri" pitchFamily="2" charset="-78"/>
+                <a:ea typeface="Amiri" pitchFamily="2" charset="-78"/>
                 <a:cs typeface="Amiri" pitchFamily="2" charset="-78"/>
               </a:rPr>
               <a:t>كُنْتُ قَدْ أَنْجَزْتُ مَشْرُوعًا</a:t>
@@ -37988,6 +38145,7 @@
                   <a:srgbClr val="1B3B6F"/>
                 </a:solidFill>
                 <a:latin typeface="Amiri" pitchFamily="2" charset="-78"/>
+                <a:ea typeface="Amiri" pitchFamily="2" charset="-78"/>
                 <a:cs typeface="Amiri" pitchFamily="2" charset="-78"/>
               </a:rPr>
               <a:t>قَالَ أُسْتَاذِي إِنَّنِي مُؤَهَّلٌ</a:t>
@@ -38014,6 +38172,7 @@
                   <a:srgbClr val="1B3B6F"/>
                 </a:solidFill>
                 <a:latin typeface="Amiri" pitchFamily="2" charset="-78"/>
+                <a:ea typeface="Amiri" pitchFamily="2" charset="-78"/>
                 <a:cs typeface="Amiri" pitchFamily="2" charset="-78"/>
               </a:rPr>
               <a:t>إِذَا قُبِلْتُ، سَأَتَخَصَّصُ</a:t>
@@ -38040,6 +38199,7 @@
                   <a:srgbClr val="1B3B6F"/>
                 </a:solidFill>
                 <a:latin typeface="Amiri" pitchFamily="2" charset="-78"/>
+                <a:ea typeface="Amiri" pitchFamily="2" charset="-78"/>
                 <a:cs typeface="Amiri" pitchFamily="2" charset="-78"/>
               </a:rPr>
               <a:t>أَطْمَحُ إِلَى</a:t>
@@ -38186,6 +38346,7 @@
                   <a:srgbClr val="D4AF37"/>
                 </a:solidFill>
                 <a:latin typeface="Amiri" pitchFamily="2" charset="-78"/>
+                <a:ea typeface="Amiri" pitchFamily="2" charset="-78"/>
                 <a:cs typeface="Amiri" pitchFamily="2" charset="-78"/>
               </a:rPr>
               <a:t>م</a:t>
@@ -38506,6 +38667,7 @@
                   <a:srgbClr val="8A6D1E"/>
                 </a:solidFill>
                 <a:latin typeface="Amiri" pitchFamily="2" charset="-78"/>
+                <a:ea typeface="Amiri" pitchFamily="2" charset="-78"/>
                 <a:cs typeface="Amiri" pitchFamily="2" charset="-78"/>
               </a:rPr>
               <a:t>التَّعْلِيمُ وَمُسْتَقْبَلِي</a:t>
@@ -39320,6 +39482,7 @@
                   <a:srgbClr val="D4AF37"/>
                 </a:solidFill>
                 <a:latin typeface="Amiri" pitchFamily="2" charset="-78"/>
+                <a:ea typeface="Amiri" pitchFamily="2" charset="-78"/>
                 <a:cs typeface="Amiri" pitchFamily="2" charset="-78"/>
               </a:rPr>
               <a:t>م</a:t>
@@ -39640,6 +39803,7 @@
                   <a:srgbClr val="8A6D1E"/>
                 </a:solidFill>
                 <a:latin typeface="Amiri" pitchFamily="2" charset="-78"/>
+                <a:ea typeface="Amiri" pitchFamily="2" charset="-78"/>
                 <a:cs typeface="Amiri" pitchFamily="2" charset="-78"/>
               </a:rPr>
               <a:t>مُقَابَلَةُ القَبُولِ</a:t>
@@ -39882,6 +40046,7 @@
                   <a:srgbClr val="1B3B6F"/>
                 </a:solidFill>
                 <a:latin typeface="Amiri" pitchFamily="2" charset="-78"/>
+                <a:ea typeface="Amiri" pitchFamily="2" charset="-78"/>
                 <a:cs typeface="Amiri" pitchFamily="2" charset="-78"/>
               </a:rPr>
               <a:t>عَرِّفْ بِنَفْسِكَ وَخَلْفِيَّتِكَ التَّعْلِيمِيَّةِ (كُنْتُ قَدْ حَصَلْتُ عَلَى …).</a:t>
@@ -40050,6 +40215,7 @@
                   <a:srgbClr val="1B3B6F"/>
                 </a:solidFill>
                 <a:latin typeface="Amiri" pitchFamily="2" charset="-78"/>
+                <a:ea typeface="Amiri" pitchFamily="2" charset="-78"/>
                 <a:cs typeface="Amiri" pitchFamily="2" charset="-78"/>
               </a:rPr>
               <a:t>صِفْ مَا قَالَهُ مُعَلِّمُوكَ عَنْكَ (قَالَ أُسْتَاذِي إِنَّنِي …).</a:t>
@@ -40218,6 +40384,7 @@
                   <a:srgbClr val="1B3B6F"/>
                 </a:solidFill>
                 <a:latin typeface="Amiri" pitchFamily="2" charset="-78"/>
+                <a:ea typeface="Amiri" pitchFamily="2" charset="-78"/>
                 <a:cs typeface="Amiri" pitchFamily="2" charset="-78"/>
               </a:rPr>
               <a:t>قُلْ مَاذَا سَتَدْرُسُ إِنْ قُبِلْتَ (إِذَا قُبِلْتُ، سَـ …).</a:t>
@@ -40386,6 +40553,7 @@
                   <a:srgbClr val="1B3B6F"/>
                 </a:solidFill>
                 <a:latin typeface="Amiri" pitchFamily="2" charset="-78"/>
+                <a:ea typeface="Amiri" pitchFamily="2" charset="-78"/>
                 <a:cs typeface="Amiri" pitchFamily="2" charset="-78"/>
               </a:rPr>
               <a:t>اطْلُبْ نَصِيحَةً حَوْلَ التَّخَصُّصِ الأَنْسَبِ لِطُمُوحِكَ.</a:t>
@@ -40622,6 +40790,7 @@
                   <a:srgbClr val="D4AF37"/>
                 </a:solidFill>
                 <a:latin typeface="Amiri" pitchFamily="2" charset="-78"/>
+                <a:ea typeface="Amiri" pitchFamily="2" charset="-78"/>
                 <a:cs typeface="Amiri" pitchFamily="2" charset="-78"/>
               </a:rPr>
               <a:t>م</a:t>
@@ -40942,6 +41111,7 @@
                   <a:srgbClr val="8A6D1E"/>
                 </a:solidFill>
                 <a:latin typeface="Amiri" pitchFamily="2" charset="-78"/>
+                <a:ea typeface="Amiri" pitchFamily="2" charset="-78"/>
                 <a:cs typeface="Amiri" pitchFamily="2" charset="-78"/>
               </a:rPr>
               <a:t>المُحَادَثَةُ</a:t>
@@ -41184,6 +41354,7 @@
                   <a:srgbClr val="1B3B6F"/>
                 </a:solidFill>
                 <a:latin typeface="Amiri" pitchFamily="2" charset="-78"/>
+                <a:ea typeface="Amiri" pitchFamily="2" charset="-78"/>
                 <a:cs typeface="Amiri" pitchFamily="2" charset="-78"/>
               </a:rPr>
               <a:t>مَا الَّذِي كُنْتَ قَدْ قَرَّرْتَهُ بِشَأْنِ مُسْتَقْبَلِكَ قَبْلَ هٰذَا العَامِ؟</a:t>
@@ -41287,6 +41458,7 @@
                   <a:srgbClr val="1B3B6F"/>
                 </a:solidFill>
                 <a:latin typeface="Amiri" pitchFamily="2" charset="-78"/>
+                <a:ea typeface="Amiri" pitchFamily="2" charset="-78"/>
                 <a:cs typeface="Amiri" pitchFamily="2" charset="-78"/>
               </a:rPr>
               <a:t>مَاذَا قَالَ مُعَلِّمُوكَ عَنْ طُمُوحَاتِكَ؟</a:t>
@@ -41390,6 +41562,7 @@
                   <a:srgbClr val="1B3B6F"/>
                 </a:solidFill>
                 <a:latin typeface="Amiri" pitchFamily="2" charset="-78"/>
+                <a:ea typeface="Amiri" pitchFamily="2" charset="-78"/>
                 <a:cs typeface="Amiri" pitchFamily="2" charset="-78"/>
               </a:rPr>
               <a:t>لَوْ كَانَتْ لَدَيْكَ مَوَارِدُ لَا نِهَائِيَّةٌ لِتَعَلُّمِ أَيِّ شَيْءٍ، مَاذَا سَتَخْتَارُ؟</a:t>
@@ -41561,6 +41734,7 @@
                   <a:srgbClr val="D4AF37"/>
                 </a:solidFill>
                 <a:latin typeface="Amiri" pitchFamily="2" charset="-78"/>
+                <a:ea typeface="Amiri" pitchFamily="2" charset="-78"/>
                 <a:cs typeface="Amiri" pitchFamily="2" charset="-78"/>
               </a:rPr>
               <a:t>م</a:t>
@@ -41881,6 +42055,7 @@
                   <a:srgbClr val="8A6D1E"/>
                 </a:solidFill>
                 <a:latin typeface="Amiri" pitchFamily="2" charset="-78"/>
+                <a:ea typeface="Amiri" pitchFamily="2" charset="-78"/>
                 <a:cs typeface="Amiri" pitchFamily="2" charset="-78"/>
               </a:rPr>
               <a:t>مِلَفُّ المَهَارَاتِ</a:t>
@@ -43053,6 +43228,7 @@
                   <a:srgbClr val="D4AF37"/>
                 </a:solidFill>
                 <a:latin typeface="Amiri" pitchFamily="2" charset="-78"/>
+                <a:ea typeface="Amiri" pitchFamily="2" charset="-78"/>
                 <a:cs typeface="Amiri" pitchFamily="2" charset="-78"/>
               </a:rPr>
               <a:t>م</a:t>
@@ -43373,6 +43549,7 @@
                   <a:srgbClr val="8A6D1E"/>
                 </a:solidFill>
                 <a:latin typeface="Amiri" pitchFamily="2" charset="-78"/>
+                <a:ea typeface="Amiri" pitchFamily="2" charset="-78"/>
                 <a:cs typeface="Amiri" pitchFamily="2" charset="-78"/>
               </a:rPr>
               <a:t>قَيِّمْ عَمَلَكَ</a:t>
@@ -44530,6 +44707,7 @@
                   <a:srgbClr val="D4AF37"/>
                 </a:solidFill>
                 <a:latin typeface="Amiri" pitchFamily="2" charset="-78"/>
+                <a:ea typeface="Amiri" pitchFamily="2" charset="-78"/>
                 <a:cs typeface="Amiri" pitchFamily="2" charset="-78"/>
               </a:rPr>
               <a:t>م</a:t>
@@ -44850,6 +45028,7 @@
                   <a:srgbClr val="8A6D1E"/>
                 </a:solidFill>
                 <a:latin typeface="Amiri" pitchFamily="2" charset="-78"/>
+                <a:ea typeface="Amiri" pitchFamily="2" charset="-78"/>
                 <a:cs typeface="Amiri" pitchFamily="2" charset="-78"/>
               </a:rPr>
               <a:t>التَّحْضِيرُ لِلدَّرْسِ القَادِمِ</a:t>
@@ -45063,6 +45242,7 @@
                   <a:srgbClr val="1B3B6F"/>
                 </a:solidFill>
                 <a:latin typeface="Amiri" pitchFamily="2" charset="-78"/>
+                <a:ea typeface="Amiri" pitchFamily="2" charset="-78"/>
                 <a:cs typeface="Amiri" pitchFamily="2" charset="-78"/>
               </a:rPr>
               <a:t>الخَطُّ الحَدِيدِيُّ السَّرِيعُ</a:t>
@@ -45152,6 +45332,7 @@
                   <a:srgbClr val="1B3B6F"/>
                 </a:solidFill>
                 <a:latin typeface="Amiri" pitchFamily="2" charset="-78"/>
+                <a:ea typeface="Amiri" pitchFamily="2" charset="-78"/>
                 <a:cs typeface="Amiri" pitchFamily="2" charset="-78"/>
               </a:rPr>
               <a:t>مِتْرُو الأَنْفَاقِ</a:t>
@@ -45241,6 +45422,7 @@
                   <a:srgbClr val="1B3B6F"/>
                 </a:solidFill>
                 <a:latin typeface="Amiri" pitchFamily="2" charset="-78"/>
+                <a:ea typeface="Amiri" pitchFamily="2" charset="-78"/>
                 <a:cs typeface="Amiri" pitchFamily="2" charset="-78"/>
               </a:rPr>
               <a:t>يَسْتَغْرِقُ</a:t>
@@ -45287,11 +45469,12 @@
               <a:buNone/>
             </a:pPr>
             <a:r>
-              <a:rPr lang="en-US" sz="1000" i="1" dirty="0">
+              <a:rPr lang="ar-SA" sz="1000" i="1" dirty="0">
                 <a:solidFill>
                   <a:srgbClr val="5A6472"/>
                 </a:solidFill>
                 <a:latin typeface="Calibri" pitchFamily="34" charset="0"/>
+                <a:ea typeface="Amiri" pitchFamily="2" charset="-78"/>
                 <a:cs typeface="Amiri" pitchFamily="2" charset="-78"/>
               </a:rPr>
               <a:t>  تَسْتَغْرِقُ she / it (f.)</a:t>
@@ -45330,6 +45513,7 @@
                   <a:srgbClr val="1B3B6F"/>
                 </a:solidFill>
                 <a:latin typeface="Amiri" pitchFamily="2" charset="-78"/>
+                <a:ea typeface="Amiri" pitchFamily="2" charset="-78"/>
                 <a:cs typeface="Amiri" pitchFamily="2" charset="-78"/>
               </a:rPr>
               <a:t>يَقْطَعُ مَسَافَةً</a:t>
@@ -45376,11 +45560,12 @@
               <a:buNone/>
             </a:pPr>
             <a:r>
-              <a:rPr lang="en-US" sz="1000" i="1" dirty="0">
+              <a:rPr lang="ar-SA" sz="1000" i="1" dirty="0">
                 <a:solidFill>
                   <a:srgbClr val="5A6472"/>
                 </a:solidFill>
                 <a:latin typeface="Calibri" pitchFamily="34" charset="0"/>
+                <a:ea typeface="Amiri" pitchFamily="2" charset="-78"/>
                 <a:cs typeface="Amiri" pitchFamily="2" charset="-78"/>
               </a:rPr>
               <a:t>  تَقْطَعُ she / it (f.)</a:t>
@@ -45419,6 +45604,7 @@
                   <a:srgbClr val="1B3B6F"/>
                 </a:solidFill>
                 <a:latin typeface="Amiri" pitchFamily="2" charset="-78"/>
+                <a:ea typeface="Amiri" pitchFamily="2" charset="-78"/>
                 <a:cs typeface="Amiri" pitchFamily="2" charset="-78"/>
               </a:rPr>
               <a:t>انْبِعَاثَاتُ الكَرْبُونِ</a:t>
@@ -45465,11 +45651,12 @@
               <a:buNone/>
             </a:pPr>
             <a:r>
-              <a:rPr lang="en-US" sz="1000" i="1" dirty="0">
+              <a:rPr lang="ar-SA" sz="1000" i="1" dirty="0">
                 <a:solidFill>
                   <a:srgbClr val="5A6472"/>
                 </a:solidFill>
                 <a:latin typeface="Calibri" pitchFamily="34" charset="0"/>
+                <a:ea typeface="Amiri" pitchFamily="2" charset="-78"/>
                 <a:cs typeface="Amiri" pitchFamily="2" charset="-78"/>
               </a:rPr>
               <a:t>  sg. انْبِعَاثٌ</a:t>
@@ -45587,6 +45774,7 @@
                   <a:srgbClr val="1B3B6F"/>
                 </a:solidFill>
                 <a:latin typeface="Amiri" pitchFamily="2" charset="-78"/>
+                <a:ea typeface="Amiri" pitchFamily="2" charset="-78"/>
                 <a:cs typeface="Amiri" pitchFamily="2" charset="-78"/>
               </a:rPr>
               <a:t>أُسَافِرُ إِلَى ______ بِوَاسِطَةِ ______ ، وَتَسْتَغْرِقُ الرِّحْلَةُ ______ .</a:t>
@@ -46256,6 +46444,7 @@
                   <a:srgbClr val="FFFFFF"/>
                 </a:solidFill>
                 <a:latin typeface="Amiri" pitchFamily="2" charset="-78"/>
+                <a:ea typeface="Amiri" pitchFamily="2" charset="-78"/>
                 <a:cs typeface="Amiri" pitchFamily="2" charset="-78"/>
               </a:rPr>
               <a:t>أَحْسَنْتُمْ! إِلَى اللِّقَاءِ</a:t>
@@ -46408,6 +46597,7 @@
                   <a:srgbClr val="D4AF37"/>
                 </a:solidFill>
                 <a:latin typeface="Amiri" pitchFamily="2" charset="-78"/>
+                <a:ea typeface="Amiri" pitchFamily="2" charset="-78"/>
                 <a:cs typeface="Amiri" pitchFamily="2" charset="-78"/>
               </a:rPr>
               <a:t>وَسَائِلُ النَّقْلِ — المُفْرَدَاتُ المُتَقَدِّمَةُ</a:t>
@@ -46541,6 +46731,7 @@
                   <a:srgbClr val="D4AF37"/>
                 </a:solidFill>
                 <a:latin typeface="Amiri" pitchFamily="2" charset="-78"/>
+                <a:ea typeface="Amiri" pitchFamily="2" charset="-78"/>
                 <a:cs typeface="Amiri" pitchFamily="2" charset="-78"/>
               </a:rPr>
               <a:t>م</a:t>
@@ -46861,6 +47052,7 @@
                   <a:srgbClr val="8A6D1E"/>
                 </a:solidFill>
                 <a:latin typeface="Amiri" pitchFamily="2" charset="-78"/>
+                <a:ea typeface="Amiri" pitchFamily="2" charset="-78"/>
                 <a:cs typeface="Amiri" pitchFamily="2" charset="-78"/>
               </a:rPr>
               <a:t>خَرِيطَةُ الدَّرْسِ</a:t>
@@ -47175,6 +47367,7 @@
                   <a:srgbClr val="0E7C86"/>
                 </a:solidFill>
                 <a:latin typeface="Amiri" pitchFamily="2" charset="-78"/>
+                <a:ea typeface="Amiri" pitchFamily="2" charset="-78"/>
                 <a:cs typeface="Amiri" pitchFamily="2" charset="-78"/>
               </a:rPr>
               <a:t>تَهْيِئَةٌ</a:t>
@@ -47451,6 +47644,7 @@
                   <a:srgbClr val="1B3B6F"/>
                 </a:solidFill>
                 <a:latin typeface="Amiri" pitchFamily="2" charset="-78"/>
+                <a:ea typeface="Amiri" pitchFamily="2" charset="-78"/>
                 <a:cs typeface="Amiri" pitchFamily="2" charset="-78"/>
               </a:rPr>
               <a:t>خُطَّةُ التَّقْيِيمِ</a:t>
@@ -47727,6 +47921,7 @@
                   <a:srgbClr val="6B4C9A"/>
                 </a:solidFill>
                 <a:latin typeface="Amiri" pitchFamily="2" charset="-78"/>
+                <a:ea typeface="Amiri" pitchFamily="2" charset="-78"/>
                 <a:cs typeface="Amiri" pitchFamily="2" charset="-78"/>
               </a:rPr>
               <a:t>الاسْتِمَاعُ</a:t>
@@ -48003,6 +48198,7 @@
                   <a:srgbClr val="2F6FB0"/>
                 </a:solidFill>
                 <a:latin typeface="Amiri" pitchFamily="2" charset="-78"/>
+                <a:ea typeface="Amiri" pitchFamily="2" charset="-78"/>
                 <a:cs typeface="Amiri" pitchFamily="2" charset="-78"/>
               </a:rPr>
               <a:t>القِرَاءَةُ</a:t>
@@ -48279,6 +48475,7 @@
                   <a:srgbClr val="1E6B52"/>
                 </a:solidFill>
                 <a:latin typeface="Amiri" pitchFamily="2" charset="-78"/>
+                <a:ea typeface="Amiri" pitchFamily="2" charset="-78"/>
                 <a:cs typeface="Amiri" pitchFamily="2" charset="-78"/>
               </a:rPr>
               <a:t>الكِتَابَةُ وَالتَّحَدُّثُ</a:t>
@@ -48555,6 +48752,7 @@
                   <a:srgbClr val="8A6D1E"/>
                 </a:solidFill>
                 <a:latin typeface="Amiri" pitchFamily="2" charset="-78"/>
+                <a:ea typeface="Amiri" pitchFamily="2" charset="-78"/>
                 <a:cs typeface="Amiri" pitchFamily="2" charset="-78"/>
               </a:rPr>
               <a:t>الهَدَفُ</a:t>
@@ -48831,6 +49029,7 @@
                   <a:srgbClr val="C45A3C"/>
                 </a:solidFill>
                 <a:latin typeface="Amiri" pitchFamily="2" charset="-78"/>
+                <a:ea typeface="Amiri" pitchFamily="2" charset="-78"/>
                 <a:cs typeface="Amiri" pitchFamily="2" charset="-78"/>
               </a:rPr>
               <a:t>اسْتَعِدَّ</a:t>
@@ -49074,6 +49273,7 @@
                   <a:srgbClr val="D4AF37"/>
                 </a:solidFill>
                 <a:latin typeface="Amiri" pitchFamily="2" charset="-78"/>
+                <a:ea typeface="Amiri" pitchFamily="2" charset="-78"/>
                 <a:cs typeface="Amiri" pitchFamily="2" charset="-78"/>
               </a:rPr>
               <a:t>م</a:t>
@@ -49394,6 +49594,7 @@
                   <a:srgbClr val="8A6D1E"/>
                 </a:solidFill>
                 <a:latin typeface="Amiri" pitchFamily="2" charset="-78"/>
+                <a:ea typeface="Amiri" pitchFamily="2" charset="-78"/>
                 <a:cs typeface="Amiri" pitchFamily="2" charset="-78"/>
               </a:rPr>
               <a:t>اِبْدَأِ الآنَ</a:t>
@@ -49580,6 +49781,7 @@
                   <a:srgbClr val="1B3B6F"/>
                 </a:solidFill>
                 <a:latin typeface="Amiri" pitchFamily="2" charset="-78"/>
+                <a:ea typeface="Amiri" pitchFamily="2" charset="-78"/>
                 <a:cs typeface="Amiri" pitchFamily="2" charset="-78"/>
               </a:rPr>
               <a:t>فَهْمُ المَسْمُوعِ</a:t>
@@ -50044,6 +50246,7 @@
                   <a:srgbClr val="1B3B6F"/>
                 </a:solidFill>
                 <a:latin typeface="Amiri" pitchFamily="2" charset="-78"/>
+                <a:ea typeface="Amiri" pitchFamily="2" charset="-78"/>
                 <a:cs typeface="Amiri" pitchFamily="2" charset="-78"/>
               </a:rPr>
               <a:t>قَالَ</a:t>
@@ -50070,6 +50273,7 @@
                   <a:srgbClr val="1B3B6F"/>
                 </a:solidFill>
                 <a:latin typeface="Amiri" pitchFamily="2" charset="-78"/>
+                <a:ea typeface="Amiri" pitchFamily="2" charset="-78"/>
                 <a:cs typeface="Amiri" pitchFamily="2" charset="-78"/>
               </a:rPr>
               <a:t>التَّعْلِيمَ حَقٌّ</a:t>
@@ -50184,6 +50388,7 @@
                   <a:srgbClr val="1F2A37"/>
                 </a:solidFill>
                 <a:latin typeface="Amiri" pitchFamily="2" charset="-78"/>
+                <a:ea typeface="Amiri" pitchFamily="2" charset="-78"/>
                 <a:cs typeface="Amiri" pitchFamily="2" charset="-78"/>
               </a:rPr>
               <a:t>إِنَّ</a:t>
@@ -50285,6 +50490,7 @@
                   <a:srgbClr val="1F2A37"/>
                 </a:solidFill>
                 <a:latin typeface="Amiri" pitchFamily="2" charset="-78"/>
+                <a:ea typeface="Amiri" pitchFamily="2" charset="-78"/>
                 <a:cs typeface="Amiri" pitchFamily="2" charset="-78"/>
               </a:rPr>
               <a:t>أَنَّ</a:t>
@@ -50386,6 +50592,7 @@
                   <a:srgbClr val="1F2A37"/>
                 </a:solidFill>
                 <a:latin typeface="Amiri" pitchFamily="2" charset="-78"/>
+                <a:ea typeface="Amiri" pitchFamily="2" charset="-78"/>
                 <a:cs typeface="Amiri" pitchFamily="2" charset="-78"/>
               </a:rPr>
               <a:t>بِأَنَّ</a:t>
@@ -50622,6 +50829,7 @@
                   <a:srgbClr val="1F2A37"/>
                 </a:solidFill>
                 <a:latin typeface="Amiri" pitchFamily="2" charset="-78"/>
+                <a:ea typeface="Amiri" pitchFamily="2" charset="-78"/>
                 <a:cs typeface="Amiri" pitchFamily="2" charset="-78"/>
               </a:rPr>
               <a:t>كَانَتْ قَدْ حَصَلَ عَلَى مِنْحَةٍ.</a:t>
@@ -50723,6 +50931,7 @@
                   <a:srgbClr val="1F2A37"/>
                 </a:solidFill>
                 <a:latin typeface="Amiri" pitchFamily="2" charset="-78"/>
+                <a:ea typeface="Amiri" pitchFamily="2" charset="-78"/>
                 <a:cs typeface="Amiri" pitchFamily="2" charset="-78"/>
               </a:rPr>
               <a:t>كَانَ قَدْ حَصَلَتْ عَلَى مِنْحَةٍ.</a:t>
@@ -50824,6 +51033,7 @@
                   <a:srgbClr val="1F2A37"/>
                 </a:solidFill>
                 <a:latin typeface="Amiri" pitchFamily="2" charset="-78"/>
+                <a:ea typeface="Amiri" pitchFamily="2" charset="-78"/>
                 <a:cs typeface="Amiri" pitchFamily="2" charset="-78"/>
               </a:rPr>
               <a:t>كَانَتْ قَدْ حَصَلَتْ عَلَى مِنْحَةٍ.</a:t>
@@ -51060,6 +51270,7 @@
                   <a:srgbClr val="1F2A37"/>
                 </a:solidFill>
                 <a:latin typeface="Amiri" pitchFamily="2" charset="-78"/>
+                <a:ea typeface="Amiri" pitchFamily="2" charset="-78"/>
                 <a:cs typeface="Amiri" pitchFamily="2" charset="-78"/>
               </a:rPr>
               <a:t>لَوْ دَرَسَ، نَجَحَ.</a:t>
@@ -51161,6 +51372,7 @@
                   <a:srgbClr val="1F2A37"/>
                 </a:solidFill>
                 <a:latin typeface="Amiri" pitchFamily="2" charset="-78"/>
+                <a:ea typeface="Amiri" pitchFamily="2" charset="-78"/>
                 <a:cs typeface="Amiri" pitchFamily="2" charset="-78"/>
               </a:rPr>
               <a:t>لَوْ دَرَسَ، سَيَنْجَحُ.</a:t>
@@ -51262,6 +51474,7 @@
                   <a:srgbClr val="1F2A37"/>
                 </a:solidFill>
                 <a:latin typeface="Amiri" pitchFamily="2" charset="-78"/>
+                <a:ea typeface="Amiri" pitchFamily="2" charset="-78"/>
                 <a:cs typeface="Amiri" pitchFamily="2" charset="-78"/>
               </a:rPr>
               <a:t>لَوْ دَرَسَ، لَنَجَحَ.</a:t>
@@ -51410,6 +51623,7 @@
                   <a:srgbClr val="1B3B6F"/>
                 </a:solidFill>
                 <a:latin typeface="Amiri" pitchFamily="2" charset="-78"/>
+                <a:ea typeface="Amiri" pitchFamily="2" charset="-78"/>
                 <a:cs typeface="Amiri" pitchFamily="2" charset="-78"/>
               </a:rPr>
               <a:t>يَتَفَوَّقُ الطَّالِبُ</a:t>
@@ -51436,6 +51650,7 @@
                   <a:srgbClr val="1B3B6F"/>
                 </a:solidFill>
                 <a:latin typeface="Amiri" pitchFamily="2" charset="-78"/>
+                <a:ea typeface="Amiri" pitchFamily="2" charset="-78"/>
                 <a:cs typeface="Amiri" pitchFamily="2" charset="-78"/>
               </a:rPr>
               <a:t>العُلُومِ</a:t>
@@ -51550,6 +51765,7 @@
                   <a:srgbClr val="1F2A37"/>
                 </a:solidFill>
                 <a:latin typeface="Amiri" pitchFamily="2" charset="-78"/>
+                <a:ea typeface="Amiri" pitchFamily="2" charset="-78"/>
                 <a:cs typeface="Amiri" pitchFamily="2" charset="-78"/>
               </a:rPr>
               <a:t>فِي</a:t>
@@ -51651,6 +51867,7 @@
                   <a:srgbClr val="1F2A37"/>
                 </a:solidFill>
                 <a:latin typeface="Amiri" pitchFamily="2" charset="-78"/>
+                <a:ea typeface="Amiri" pitchFamily="2" charset="-78"/>
                 <a:cs typeface="Amiri" pitchFamily="2" charset="-78"/>
               </a:rPr>
               <a:t>عَلَى</a:t>
@@ -51752,6 +51969,7 @@
                   <a:srgbClr val="1F2A37"/>
                 </a:solidFill>
                 <a:latin typeface="Amiri" pitchFamily="2" charset="-78"/>
+                <a:ea typeface="Amiri" pitchFamily="2" charset="-78"/>
                 <a:cs typeface="Amiri" pitchFamily="2" charset="-78"/>
               </a:rPr>
               <a:t>بِـ</a:t>
@@ -52087,6 +52305,7 @@
                   <a:srgbClr val="D4AF37"/>
                 </a:solidFill>
                 <a:latin typeface="Amiri" pitchFamily="2" charset="-78"/>
+                <a:ea typeface="Amiri" pitchFamily="2" charset="-78"/>
                 <a:cs typeface="Amiri" pitchFamily="2" charset="-78"/>
               </a:rPr>
               <a:t>م</a:t>
@@ -52407,6 +52626,7 @@
                   <a:srgbClr val="8A6D1E"/>
                 </a:solidFill>
                 <a:latin typeface="Amiri" pitchFamily="2" charset="-78"/>
+                <a:ea typeface="Amiri" pitchFamily="2" charset="-78"/>
                 <a:cs typeface="Amiri" pitchFamily="2" charset="-78"/>
               </a:rPr>
               <a:t>الإِجَابَاتُ وَالتَّعْلِيلُ</a:t>
@@ -52593,6 +52813,7 @@
                   <a:srgbClr val="1B3B6F"/>
                 </a:solidFill>
                 <a:latin typeface="Amiri" pitchFamily="2" charset="-78"/>
+                <a:ea typeface="Amiri" pitchFamily="2" charset="-78"/>
                 <a:cs typeface="Amiri" pitchFamily="2" charset="-78"/>
               </a:rPr>
               <a:t>فَهْمُ المَسْمُوعِ</a:t>
@@ -53122,6 +53343,7 @@
                   <a:srgbClr val="1B3B6F"/>
                 </a:solidFill>
                 <a:latin typeface="Amiri" pitchFamily="2" charset="-78"/>
+                <a:ea typeface="Amiri" pitchFamily="2" charset="-78"/>
                 <a:cs typeface="Amiri" pitchFamily="2" charset="-78"/>
               </a:rPr>
               <a:t>قَالَ</a:t>
@@ -53148,6 +53370,7 @@
                   <a:srgbClr val="1B3B6F"/>
                 </a:solidFill>
                 <a:latin typeface="Amiri" pitchFamily="2" charset="-78"/>
+                <a:ea typeface="Amiri" pitchFamily="2" charset="-78"/>
                 <a:cs typeface="Amiri" pitchFamily="2" charset="-78"/>
               </a:rPr>
               <a:t>التَّعْلِيمَ حَقٌّ</a:t>
@@ -53289,6 +53512,7 @@
                   <a:srgbClr val="1F2A37"/>
                 </a:solidFill>
                 <a:latin typeface="Amiri" pitchFamily="2" charset="-78"/>
+                <a:ea typeface="Amiri" pitchFamily="2" charset="-78"/>
                 <a:cs typeface="Amiri" pitchFamily="2" charset="-78"/>
               </a:rPr>
               <a:t>إِنَّ</a:t>
@@ -53390,6 +53614,7 @@
                   <a:srgbClr val="9AA1AB"/>
                 </a:solidFill>
                 <a:latin typeface="Amiri" pitchFamily="2" charset="-78"/>
+                <a:ea typeface="Amiri" pitchFamily="2" charset="-78"/>
                 <a:cs typeface="Amiri" pitchFamily="2" charset="-78"/>
               </a:rPr>
               <a:t>أَنَّ</a:t>
@@ -53491,6 +53716,7 @@
                   <a:srgbClr val="9AA1AB"/>
                 </a:solidFill>
                 <a:latin typeface="Amiri" pitchFamily="2" charset="-78"/>
+                <a:ea typeface="Amiri" pitchFamily="2" charset="-78"/>
                 <a:cs typeface="Amiri" pitchFamily="2" charset="-78"/>
               </a:rPr>
               <a:t>بِأَنَّ</a:t>
@@ -53765,6 +53991,7 @@
                   <a:srgbClr val="9AA1AB"/>
                 </a:solidFill>
                 <a:latin typeface="Amiri" pitchFamily="2" charset="-78"/>
+                <a:ea typeface="Amiri" pitchFamily="2" charset="-78"/>
                 <a:cs typeface="Amiri" pitchFamily="2" charset="-78"/>
               </a:rPr>
               <a:t>كَانَتْ قَدْ حَصَلَ عَلَى مِنْحَةٍ.</a:t>
@@ -53866,6 +54093,7 @@
                   <a:srgbClr val="9AA1AB"/>
                 </a:solidFill>
                 <a:latin typeface="Amiri" pitchFamily="2" charset="-78"/>
+                <a:ea typeface="Amiri" pitchFamily="2" charset="-78"/>
                 <a:cs typeface="Amiri" pitchFamily="2" charset="-78"/>
               </a:rPr>
               <a:t>كَانَ قَدْ حَصَلَتْ عَلَى مِنْحَةٍ.</a:t>
@@ -53994,6 +54222,7 @@
                   <a:srgbClr val="1F2A37"/>
                 </a:solidFill>
                 <a:latin typeface="Amiri" pitchFamily="2" charset="-78"/>
+                <a:ea typeface="Amiri" pitchFamily="2" charset="-78"/>
                 <a:cs typeface="Amiri" pitchFamily="2" charset="-78"/>
               </a:rPr>
               <a:t>كَانَتْ قَدْ حَصَلَتْ عَلَى مِنْحَةٍ.</a:t>
@@ -54268,6 +54497,7 @@
                   <a:srgbClr val="9AA1AB"/>
                 </a:solidFill>
                 <a:latin typeface="Amiri" pitchFamily="2" charset="-78"/>
+                <a:ea typeface="Amiri" pitchFamily="2" charset="-78"/>
                 <a:cs typeface="Amiri" pitchFamily="2" charset="-78"/>
               </a:rPr>
               <a:t>لَوْ دَرَسَ، نَجَحَ.</a:t>
@@ -54369,6 +54599,7 @@
                   <a:srgbClr val="9AA1AB"/>
                 </a:solidFill>
                 <a:latin typeface="Amiri" pitchFamily="2" charset="-78"/>
+                <a:ea typeface="Amiri" pitchFamily="2" charset="-78"/>
                 <a:cs typeface="Amiri" pitchFamily="2" charset="-78"/>
               </a:rPr>
               <a:t>لَوْ دَرَسَ، سَيَنْجَحُ.</a:t>
@@ -54497,6 +54728,7 @@
                   <a:srgbClr val="1F2A37"/>
                 </a:solidFill>
                 <a:latin typeface="Amiri" pitchFamily="2" charset="-78"/>
+                <a:ea typeface="Amiri" pitchFamily="2" charset="-78"/>
                 <a:cs typeface="Amiri" pitchFamily="2" charset="-78"/>
               </a:rPr>
               <a:t>لَوْ دَرَسَ، لَنَجَحَ.</a:t>
@@ -54683,6 +54915,7 @@
                   <a:srgbClr val="1B3B6F"/>
                 </a:solidFill>
                 <a:latin typeface="Amiri" pitchFamily="2" charset="-78"/>
+                <a:ea typeface="Amiri" pitchFamily="2" charset="-78"/>
                 <a:cs typeface="Amiri" pitchFamily="2" charset="-78"/>
               </a:rPr>
               <a:t>يَتَفَوَّقُ الطَّالِبُ</a:t>
@@ -54709,6 +54942,7 @@
                   <a:srgbClr val="1B3B6F"/>
                 </a:solidFill>
                 <a:latin typeface="Amiri" pitchFamily="2" charset="-78"/>
+                <a:ea typeface="Amiri" pitchFamily="2" charset="-78"/>
                 <a:cs typeface="Amiri" pitchFamily="2" charset="-78"/>
               </a:rPr>
               <a:t>العُلُومِ</a:t>
@@ -54850,6 +55084,7 @@
                   <a:srgbClr val="1F2A37"/>
                 </a:solidFill>
                 <a:latin typeface="Amiri" pitchFamily="2" charset="-78"/>
+                <a:ea typeface="Amiri" pitchFamily="2" charset="-78"/>
                 <a:cs typeface="Amiri" pitchFamily="2" charset="-78"/>
               </a:rPr>
               <a:t>فِي</a:t>
@@ -54951,6 +55186,7 @@
                   <a:srgbClr val="9AA1AB"/>
                 </a:solidFill>
                 <a:latin typeface="Amiri" pitchFamily="2" charset="-78"/>
+                <a:ea typeface="Amiri" pitchFamily="2" charset="-78"/>
                 <a:cs typeface="Amiri" pitchFamily="2" charset="-78"/>
               </a:rPr>
               <a:t>عَلَى</a:t>
@@ -55052,6 +55288,7 @@
                   <a:srgbClr val="9AA1AB"/>
                 </a:solidFill>
                 <a:latin typeface="Amiri" pitchFamily="2" charset="-78"/>
+                <a:ea typeface="Amiri" pitchFamily="2" charset="-78"/>
                 <a:cs typeface="Amiri" pitchFamily="2" charset="-78"/>
               </a:rPr>
               <a:t>بِـ</a:t>
@@ -55241,6 +55478,7 @@
                   <a:srgbClr val="1B3B6F"/>
                 </a:solidFill>
                 <a:latin typeface="Amiri" pitchFamily="2" charset="-78"/>
+                <a:ea typeface="Amiri" pitchFamily="2" charset="-78"/>
                 <a:cs typeface="Amiri" pitchFamily="2" charset="-78"/>
               </a:rPr>
               <a:t>قَالَ إِنَّ · كَانَتْ قَدْ … · إِذَا … سَـ · لَوْ … لَـ</a:t>
@@ -55374,6 +55612,7 @@
                   <a:srgbClr val="D4AF37"/>
                 </a:solidFill>
                 <a:latin typeface="Amiri" pitchFamily="2" charset="-78"/>
+                <a:ea typeface="Amiri" pitchFamily="2" charset="-78"/>
                 <a:cs typeface="Amiri" pitchFamily="2" charset="-78"/>
               </a:rPr>
               <a:t>م</a:t>
@@ -55694,6 +55933,7 @@
                   <a:srgbClr val="8A6D1E"/>
                 </a:solidFill>
                 <a:latin typeface="Amiri" pitchFamily="2" charset="-78"/>
+                <a:ea typeface="Amiri" pitchFamily="2" charset="-78"/>
                 <a:cs typeface="Amiri" pitchFamily="2" charset="-78"/>
               </a:rPr>
               <a:t>مُرَاجَعَةُ القَوَاعِدِ</a:t>
@@ -55974,6 +56214,7 @@
                   <a:srgbClr val="1B3B6F"/>
                 </a:solidFill>
                 <a:latin typeface="Amiri" pitchFamily="2" charset="-78"/>
+                <a:ea typeface="Amiri" pitchFamily="2" charset="-78"/>
                 <a:cs typeface="Amiri" pitchFamily="2" charset="-78"/>
               </a:rPr>
               <a:t>قَالَ إِنَّهُ سَيَدْرُسُ الطِّبَّ · أَكَّدَ أَنَّ المَنَاهِجَ تَتَطَوَّرُ</a:t>
@@ -56180,6 +56421,7 @@
                   <a:srgbClr val="1B3B6F"/>
                 </a:solidFill>
                 <a:latin typeface="Amiri" pitchFamily="2" charset="-78"/>
+                <a:ea typeface="Amiri" pitchFamily="2" charset="-78"/>
                 <a:cs typeface="Amiri" pitchFamily="2" charset="-78"/>
               </a:rPr>
               <a:t>كَانَتْ قَدْ حَصَلَتْ عَلَى مِنْحَةٍ · كُنْتُ قَدْ أَنْهَيْتُ بَحْثِي</a:t>
@@ -56386,6 +56628,7 @@
                   <a:srgbClr val="1B3B6F"/>
                 </a:solidFill>
                 <a:latin typeface="Amiri" pitchFamily="2" charset="-78"/>
+                <a:ea typeface="Amiri" pitchFamily="2" charset="-78"/>
                 <a:cs typeface="Amiri" pitchFamily="2" charset="-78"/>
               </a:rPr>
               <a:t>إِذَا دَرَسْتَ، سَتَنْجَحُ · لَوْ دَرَسَ، لَنَجَحَ</a:t>
@@ -56592,6 +56835,7 @@
                   <a:srgbClr val="1B3B6F"/>
                 </a:solidFill>
                 <a:latin typeface="Amiri" pitchFamily="2" charset="-78"/>
+                <a:ea typeface="Amiri" pitchFamily="2" charset="-78"/>
                 <a:cs typeface="Amiri" pitchFamily="2" charset="-78"/>
               </a:rPr>
               <a:t>أَشَارَ إِلَى أَنَّ · يَتَفَوَّقُ فِي · يُؤَهِّلُ لِـ</a:t>
@@ -56733,6 +56977,7 @@
                   <a:srgbClr val="1B3B6F"/>
                 </a:solidFill>
                 <a:latin typeface="Amiri" pitchFamily="2" charset="-78"/>
+                <a:ea typeface="Amiri" pitchFamily="2" charset="-78"/>
                 <a:cs typeface="Amiri" pitchFamily="2" charset="-78"/>
               </a:rPr>
               <a:t>أَنَّ التَّحْصِيلَ يَتَحَسَّنُ</a:t>
@@ -56942,6 +57187,7 @@
                   <a:srgbClr val="D4AF37"/>
                 </a:solidFill>
                 <a:latin typeface="Amiri" pitchFamily="2" charset="-78"/>
+                <a:ea typeface="Amiri" pitchFamily="2" charset="-78"/>
                 <a:cs typeface="Amiri" pitchFamily="2" charset="-78"/>
               </a:rPr>
               <a:t>م</a:t>
@@ -57262,6 +57508,7 @@
                   <a:srgbClr val="8A6D1E"/>
                 </a:solidFill>
                 <a:latin typeface="Amiri" pitchFamily="2" charset="-78"/>
+                <a:ea typeface="Amiri" pitchFamily="2" charset="-78"/>
                 <a:cs typeface="Amiri" pitchFamily="2" charset="-78"/>
               </a:rPr>
               <a:t>خُطَّةُ التَّقْيِيمِ</a:t>
@@ -58396,6 +58643,7 @@
                   <a:srgbClr val="D4AF37"/>
                 </a:solidFill>
                 <a:latin typeface="Amiri" pitchFamily="2" charset="-78"/>
+                <a:ea typeface="Amiri" pitchFamily="2" charset="-78"/>
                 <a:cs typeface="Amiri" pitchFamily="2" charset="-78"/>
               </a:rPr>
               <a:t>م</a:t>
@@ -58716,6 +58964,7 @@
                   <a:srgbClr val="8A6D1E"/>
                 </a:solidFill>
                 <a:latin typeface="Amiri" pitchFamily="2" charset="-78"/>
+                <a:ea typeface="Amiri" pitchFamily="2" charset="-78"/>
                 <a:cs typeface="Amiri" pitchFamily="2" charset="-78"/>
               </a:rPr>
               <a:t>الاسْتِمَاعُ</a:t>
@@ -60639,6 +60888,7 @@
                   <a:srgbClr val="D4AF37"/>
                 </a:solidFill>
                 <a:latin typeface="Amiri" pitchFamily="2" charset="-78"/>
+                <a:ea typeface="Amiri" pitchFamily="2" charset="-78"/>
                 <a:cs typeface="Amiri" pitchFamily="2" charset="-78"/>
               </a:rPr>
               <a:t>م</a:t>
@@ -60959,6 +61209,7 @@
                   <a:srgbClr val="8A6D1E"/>
                 </a:solidFill>
                 <a:latin typeface="Amiri" pitchFamily="2" charset="-78"/>
+                <a:ea typeface="Amiri" pitchFamily="2" charset="-78"/>
                 <a:cs typeface="Amiri" pitchFamily="2" charset="-78"/>
               </a:rPr>
               <a:t>الإِجَابَاتُ</a:t>
@@ -61500,6 +61751,7 @@
                   <a:srgbClr val="8A6D1E"/>
                 </a:solidFill>
                 <a:latin typeface="Amiri" pitchFamily="2" charset="-78"/>
+                <a:ea typeface="Amiri" pitchFamily="2" charset="-78"/>
                 <a:cs typeface="Amiri" pitchFamily="2" charset="-78"/>
               </a:rPr>
               <a:t>كُنْتُ قَدْ قَرَّرْتُ … وَكُنْتُ قَدْ حَصَلْتُ عَلَى خِبْرَةٍ.</a:t>
@@ -62003,6 +62255,7 @@
                   <a:srgbClr val="8A6D1E"/>
                 </a:solidFill>
                 <a:latin typeface="Amiri" pitchFamily="2" charset="-78"/>
+                <a:ea typeface="Amiri" pitchFamily="2" charset="-78"/>
                 <a:cs typeface="Amiri" pitchFamily="2" charset="-78"/>
               </a:rPr>
               <a:t>قَالَ مُرْشِدِي إِنَّنِي مُؤَهَّلٌ.</a:t>
@@ -62506,6 +62759,7 @@
                   <a:srgbClr val="8A6D1E"/>
                 </a:solidFill>
                 <a:latin typeface="Amiri" pitchFamily="2" charset="-78"/>
+                <a:ea typeface="Amiri" pitchFamily="2" charset="-78"/>
                 <a:cs typeface="Amiri" pitchFamily="2" charset="-78"/>
               </a:rPr>
               <a:t>إِذَا قُبِلْتُ … سَأَتَخَصَّصُ فِي الطَّاقَةِ المُتَجَدِّدَةِ.</a:t>
@@ -63009,6 +63263,7 @@
                   <a:srgbClr val="8A6D1E"/>
                 </a:solidFill>
                 <a:latin typeface="Amiri" pitchFamily="2" charset="-78"/>
+                <a:ea typeface="Amiri" pitchFamily="2" charset="-78"/>
                 <a:cs typeface="Amiri" pitchFamily="2" charset="-78"/>
               </a:rPr>
               <a:t>لَوْ تَوَافَرَتْ لِي مَوَارِدُ أَفْضَلُ … لَكُنْتُ قَدْ تَقَدَّمْتُ أَسْرَعَ.</a:t>
@@ -63107,13 +63362,9 @@
     <a:fontScheme name="Office">
       <a:majorFont>
         <a:latin typeface="Calibri Light" panose="020F0302020204030204"/>
-        <a:ea typeface=""/>
-        <a:cs typeface=""/>
-        <a:font script="Jpan" typeface="游ゴシック Light"/>
-        <a:font script="Hang" typeface="맑은 고딕"/>
-        <a:font script="Hans" typeface="等线 Light"/>
-        <a:font script="Hant" typeface="新細明體"/>
-        <a:font script="Arab" typeface="Times New Roman"/>
+        <a:ea typeface="Amiri" pitchFamily="2" charset="-78"/>
+        <a:cs typeface="Amiri" pitchFamily="2" charset="-78"/>
+        <a:font script="Arab" typeface="Amiri"/>
         <a:font script="Hebr" typeface="Times New Roman"/>
         <a:font script="Thai" typeface="Angsana New"/>
         <a:font script="Ethi" typeface="Nyala"/>
@@ -63159,13 +63410,9 @@
       </a:majorFont>
       <a:minorFont>
         <a:latin typeface="Calibri" panose="020F0502020204030204"/>
-        <a:ea typeface=""/>
-        <a:cs typeface=""/>
-        <a:font script="Jpan" typeface="游ゴシック"/>
-        <a:font script="Hang" typeface="맑은 고딕"/>
-        <a:font script="Hans" typeface="等线"/>
-        <a:font script="Hant" typeface="新細明體"/>
-        <a:font script="Arab" typeface="Arial"/>
+        <a:ea typeface="Amiri" pitchFamily="2" charset="-78"/>
+        <a:cs typeface="Amiri" pitchFamily="2" charset="-78"/>
+        <a:font script="Arab" typeface="Amiri"/>
         <a:font script="Hebr" typeface="Arial"/>
         <a:font script="Thai" typeface="Cordia New"/>
         <a:font script="Ethi" typeface="Nyala"/>
